--- a/docs/pptx/entire/ritu-entire-linsubhr-ratio-aki2.pptx
+++ b/docs/pptx/entire/ritu-entire-linsubhr-ratio-aki2.pptx
@@ -2960,593 +2960,593 @@
           <p:spPr>
             <a:xfrm>
               <a:off x="1172049" y="2073503"/>
-              <a:ext cx="7090630" cy="3346577"/>
+              <a:ext cx="7090630" cy="3347235"/>
             </a:xfrm>
             <a:custGeom>
               <a:avLst/>
               <a:pathLst>
-                <a:path w="7090630" h="3346577">
+                <a:path w="7090630" h="3347235">
                   <a:moveTo>
-                    <a:pt x="486019" y="0"/>
+                    <a:pt x="493735" y="0"/>
                   </a:moveTo>
                   <a:lnTo>
-                    <a:pt x="501357" y="26430"/>
-                  </a:lnTo>
-                  <a:lnTo>
-                    <a:pt x="572980" y="145599"/>
-                  </a:lnTo>
-                  <a:lnTo>
-                    <a:pt x="644602" y="260659"/>
-                  </a:lnTo>
-                  <a:lnTo>
-                    <a:pt x="716225" y="371754"/>
-                  </a:lnTo>
-                  <a:lnTo>
-                    <a:pt x="787847" y="479019"/>
-                  </a:lnTo>
-                  <a:lnTo>
-                    <a:pt x="859470" y="582588"/>
-                  </a:lnTo>
-                  <a:lnTo>
-                    <a:pt x="931092" y="682586"/>
-                  </a:lnTo>
-                  <a:lnTo>
-                    <a:pt x="1002715" y="779137"/>
-                  </a:lnTo>
-                  <a:lnTo>
-                    <a:pt x="1074337" y="872361"/>
-                  </a:lnTo>
-                  <a:lnTo>
-                    <a:pt x="1145960" y="962371"/>
-                  </a:lnTo>
-                  <a:lnTo>
-                    <a:pt x="1217582" y="1049279"/>
-                  </a:lnTo>
-                  <a:lnTo>
-                    <a:pt x="1289205" y="1133191"/>
-                  </a:lnTo>
-                  <a:lnTo>
-                    <a:pt x="1360827" y="1214211"/>
-                  </a:lnTo>
-                  <a:lnTo>
-                    <a:pt x="1432450" y="1292438"/>
-                  </a:lnTo>
-                  <a:lnTo>
-                    <a:pt x="1504073" y="1367969"/>
-                  </a:lnTo>
-                  <a:lnTo>
-                    <a:pt x="1575695" y="1440897"/>
-                  </a:lnTo>
-                  <a:lnTo>
-                    <a:pt x="1647318" y="1511311"/>
-                  </a:lnTo>
-                  <a:lnTo>
-                    <a:pt x="1718940" y="1579297"/>
-                  </a:lnTo>
-                  <a:lnTo>
-                    <a:pt x="1790563" y="1644941"/>
-                  </a:lnTo>
-                  <a:lnTo>
-                    <a:pt x="1862185" y="1708321"/>
-                  </a:lnTo>
-                  <a:lnTo>
-                    <a:pt x="1933808" y="1769517"/>
-                  </a:lnTo>
-                  <a:lnTo>
-                    <a:pt x="2005430" y="1828604"/>
-                  </a:lnTo>
-                  <a:lnTo>
-                    <a:pt x="2077053" y="1885654"/>
-                  </a:lnTo>
-                  <a:lnTo>
-                    <a:pt x="2148675" y="1940738"/>
-                  </a:lnTo>
-                  <a:lnTo>
-                    <a:pt x="2220298" y="1993923"/>
-                  </a:lnTo>
-                  <a:lnTo>
-                    <a:pt x="2291920" y="2045275"/>
-                  </a:lnTo>
-                  <a:lnTo>
-                    <a:pt x="2363543" y="2094857"/>
-                  </a:lnTo>
-                  <a:lnTo>
-                    <a:pt x="2435165" y="2142729"/>
-                  </a:lnTo>
-                  <a:lnTo>
-                    <a:pt x="2506788" y="2188952"/>
-                  </a:lnTo>
-                  <a:lnTo>
-                    <a:pt x="2578410" y="2233582"/>
-                  </a:lnTo>
-                  <a:lnTo>
-                    <a:pt x="2650033" y="2276673"/>
-                  </a:lnTo>
-                  <a:lnTo>
-                    <a:pt x="2721655" y="2318279"/>
-                  </a:lnTo>
-                  <a:lnTo>
-                    <a:pt x="2793278" y="2358451"/>
-                  </a:lnTo>
-                  <a:lnTo>
-                    <a:pt x="2864901" y="2397238"/>
-                  </a:lnTo>
-                  <a:lnTo>
-                    <a:pt x="2936523" y="2434688"/>
-                  </a:lnTo>
-                  <a:lnTo>
-                    <a:pt x="3008146" y="2470847"/>
-                  </a:lnTo>
-                  <a:lnTo>
-                    <a:pt x="3079768" y="2505760"/>
-                  </a:lnTo>
-                  <a:lnTo>
-                    <a:pt x="3151391" y="2539470"/>
-                  </a:lnTo>
-                  <a:lnTo>
-                    <a:pt x="3223013" y="2572018"/>
-                  </a:lnTo>
-                  <a:lnTo>
-                    <a:pt x="3294636" y="2603444"/>
-                  </a:lnTo>
-                  <a:lnTo>
-                    <a:pt x="3366258" y="2633786"/>
-                  </a:lnTo>
-                  <a:lnTo>
-                    <a:pt x="3437881" y="2657056"/>
-                  </a:lnTo>
-                  <a:lnTo>
-                    <a:pt x="3509503" y="2666111"/>
-                  </a:lnTo>
-                  <a:lnTo>
-                    <a:pt x="3581126" y="2675066"/>
-                  </a:lnTo>
-                  <a:lnTo>
-                    <a:pt x="3652748" y="2683923"/>
-                  </a:lnTo>
-                  <a:lnTo>
-                    <a:pt x="3724371" y="2692684"/>
-                  </a:lnTo>
-                  <a:lnTo>
-                    <a:pt x="3795993" y="2701348"/>
-                  </a:lnTo>
-                  <a:lnTo>
-                    <a:pt x="3867616" y="2709917"/>
-                  </a:lnTo>
-                  <a:lnTo>
-                    <a:pt x="3939238" y="2718393"/>
-                  </a:lnTo>
-                  <a:lnTo>
-                    <a:pt x="4010861" y="2726776"/>
-                  </a:lnTo>
-                  <a:lnTo>
-                    <a:pt x="4082483" y="2735067"/>
-                  </a:lnTo>
-                  <a:lnTo>
-                    <a:pt x="4154106" y="2743267"/>
-                  </a:lnTo>
-                  <a:lnTo>
-                    <a:pt x="4225729" y="2751377"/>
-                  </a:lnTo>
-                  <a:lnTo>
-                    <a:pt x="4297351" y="2759399"/>
-                  </a:lnTo>
-                  <a:lnTo>
-                    <a:pt x="4368974" y="2767332"/>
-                  </a:lnTo>
-                  <a:lnTo>
-                    <a:pt x="4440596" y="2775179"/>
-                  </a:lnTo>
-                  <a:lnTo>
-                    <a:pt x="4512219" y="2782940"/>
-                  </a:lnTo>
-                  <a:lnTo>
-                    <a:pt x="4583841" y="2790616"/>
-                  </a:lnTo>
-                  <a:lnTo>
-                    <a:pt x="4655464" y="2798207"/>
-                  </a:lnTo>
-                  <a:lnTo>
-                    <a:pt x="4727086" y="2805716"/>
-                  </a:lnTo>
-                  <a:lnTo>
-                    <a:pt x="4798709" y="2813142"/>
-                  </a:lnTo>
-                  <a:lnTo>
-                    <a:pt x="4870331" y="2820487"/>
-                  </a:lnTo>
-                  <a:lnTo>
-                    <a:pt x="4941954" y="2827752"/>
-                  </a:lnTo>
-                  <a:lnTo>
-                    <a:pt x="5013576" y="2834937"/>
-                  </a:lnTo>
-                  <a:lnTo>
-                    <a:pt x="5085199" y="2842043"/>
-                  </a:lnTo>
-                  <a:lnTo>
-                    <a:pt x="5156821" y="2849071"/>
-                  </a:lnTo>
-                  <a:lnTo>
-                    <a:pt x="5228444" y="2856023"/>
-                  </a:lnTo>
-                  <a:lnTo>
-                    <a:pt x="5300066" y="2862898"/>
-                  </a:lnTo>
-                  <a:lnTo>
-                    <a:pt x="5371689" y="2869698"/>
-                  </a:lnTo>
-                  <a:lnTo>
-                    <a:pt x="5443311" y="2876424"/>
-                  </a:lnTo>
-                  <a:lnTo>
-                    <a:pt x="5514934" y="2883076"/>
-                  </a:lnTo>
-                  <a:lnTo>
-                    <a:pt x="5586557" y="2889655"/>
-                  </a:lnTo>
-                  <a:lnTo>
-                    <a:pt x="5658179" y="2896162"/>
-                  </a:lnTo>
-                  <a:lnTo>
-                    <a:pt x="5729802" y="2902597"/>
-                  </a:lnTo>
-                  <a:lnTo>
-                    <a:pt x="5801424" y="2908963"/>
-                  </a:lnTo>
-                  <a:lnTo>
-                    <a:pt x="5873047" y="2915258"/>
-                  </a:lnTo>
-                  <a:lnTo>
-                    <a:pt x="5944669" y="2921485"/>
-                  </a:lnTo>
-                  <a:lnTo>
-                    <a:pt x="6016292" y="2927643"/>
-                  </a:lnTo>
-                  <a:lnTo>
-                    <a:pt x="6087914" y="2933734"/>
-                  </a:lnTo>
-                  <a:lnTo>
-                    <a:pt x="6159537" y="2939758"/>
-                  </a:lnTo>
-                  <a:lnTo>
-                    <a:pt x="6231159" y="2945716"/>
-                  </a:lnTo>
-                  <a:lnTo>
-                    <a:pt x="6302782" y="2951609"/>
-                  </a:lnTo>
-                  <a:lnTo>
-                    <a:pt x="6374404" y="2957437"/>
-                  </a:lnTo>
-                  <a:lnTo>
-                    <a:pt x="6446027" y="2963202"/>
-                  </a:lnTo>
-                  <a:lnTo>
-                    <a:pt x="6517649" y="2968903"/>
-                  </a:lnTo>
-                  <a:lnTo>
-                    <a:pt x="6589272" y="2974542"/>
-                  </a:lnTo>
-                  <a:lnTo>
-                    <a:pt x="6660894" y="2980120"/>
-                  </a:lnTo>
-                  <a:lnTo>
-                    <a:pt x="6732517" y="2985636"/>
-                  </a:lnTo>
-                  <a:lnTo>
-                    <a:pt x="6804139" y="2991091"/>
-                  </a:lnTo>
-                  <a:lnTo>
-                    <a:pt x="6875762" y="2996487"/>
-                  </a:lnTo>
-                  <a:lnTo>
-                    <a:pt x="6947385" y="3001824"/>
-                  </a:lnTo>
-                  <a:lnTo>
-                    <a:pt x="7019007" y="3007103"/>
-                  </a:lnTo>
-                  <a:lnTo>
-                    <a:pt x="7090630" y="3012323"/>
-                  </a:lnTo>
-                  <a:lnTo>
-                    <a:pt x="7090630" y="3346577"/>
-                  </a:lnTo>
-                  <a:lnTo>
-                    <a:pt x="7019007" y="3341681"/>
-                  </a:lnTo>
-                  <a:lnTo>
-                    <a:pt x="6947385" y="3336609"/>
-                  </a:lnTo>
-                  <a:lnTo>
-                    <a:pt x="6875762" y="3331356"/>
-                  </a:lnTo>
-                  <a:lnTo>
-                    <a:pt x="6804139" y="3325916"/>
-                  </a:lnTo>
-                  <a:lnTo>
-                    <a:pt x="6732517" y="3320282"/>
-                  </a:lnTo>
-                  <a:lnTo>
-                    <a:pt x="6660894" y="3314446"/>
-                  </a:lnTo>
-                  <a:lnTo>
-                    <a:pt x="6589272" y="3308403"/>
-                  </a:lnTo>
-                  <a:lnTo>
-                    <a:pt x="6517649" y="3302143"/>
-                  </a:lnTo>
-                  <a:lnTo>
-                    <a:pt x="6446027" y="3295660"/>
-                  </a:lnTo>
-                  <a:lnTo>
-                    <a:pt x="6374404" y="3288945"/>
-                  </a:lnTo>
-                  <a:lnTo>
-                    <a:pt x="6302782" y="3281991"/>
-                  </a:lnTo>
-                  <a:lnTo>
-                    <a:pt x="6231159" y="3274789"/>
-                  </a:lnTo>
-                  <a:lnTo>
-                    <a:pt x="6159537" y="3267329"/>
-                  </a:lnTo>
-                  <a:lnTo>
-                    <a:pt x="6087914" y="3259603"/>
-                  </a:lnTo>
-                  <a:lnTo>
-                    <a:pt x="6016292" y="3251602"/>
-                  </a:lnTo>
-                  <a:lnTo>
-                    <a:pt x="5944669" y="3243314"/>
-                  </a:lnTo>
-                  <a:lnTo>
-                    <a:pt x="5873047" y="3234731"/>
-                  </a:lnTo>
-                  <a:lnTo>
-                    <a:pt x="5801424" y="3225842"/>
-                  </a:lnTo>
-                  <a:lnTo>
-                    <a:pt x="5729802" y="3216635"/>
-                  </a:lnTo>
-                  <a:lnTo>
-                    <a:pt x="5658179" y="3207099"/>
-                  </a:lnTo>
-                  <a:lnTo>
-                    <a:pt x="5586557" y="3197223"/>
-                  </a:lnTo>
-                  <a:lnTo>
-                    <a:pt x="5514934" y="3186995"/>
-                  </a:lnTo>
-                  <a:lnTo>
-                    <a:pt x="5443311" y="3176401"/>
-                  </a:lnTo>
-                  <a:lnTo>
-                    <a:pt x="5371689" y="3165429"/>
-                  </a:lnTo>
-                  <a:lnTo>
-                    <a:pt x="5300066" y="3154065"/>
-                  </a:lnTo>
-                  <a:lnTo>
-                    <a:pt x="5228444" y="3142296"/>
-                  </a:lnTo>
-                  <a:lnTo>
-                    <a:pt x="5156821" y="3130107"/>
-                  </a:lnTo>
-                  <a:lnTo>
-                    <a:pt x="5085199" y="3117482"/>
-                  </a:lnTo>
-                  <a:lnTo>
-                    <a:pt x="5013576" y="3104407"/>
-                  </a:lnTo>
-                  <a:lnTo>
-                    <a:pt x="4941954" y="3090865"/>
-                  </a:lnTo>
-                  <a:lnTo>
-                    <a:pt x="4870331" y="3076840"/>
-                  </a:lnTo>
-                  <a:lnTo>
-                    <a:pt x="4798709" y="3062314"/>
-                  </a:lnTo>
-                  <a:lnTo>
-                    <a:pt x="4727086" y="3047269"/>
-                  </a:lnTo>
-                  <a:lnTo>
-                    <a:pt x="4655464" y="3031687"/>
-                  </a:lnTo>
-                  <a:lnTo>
-                    <a:pt x="4583841" y="3015549"/>
-                  </a:lnTo>
-                  <a:lnTo>
-                    <a:pt x="4512219" y="2998835"/>
-                  </a:lnTo>
-                  <a:lnTo>
-                    <a:pt x="4440596" y="2981524"/>
-                  </a:lnTo>
-                  <a:lnTo>
-                    <a:pt x="4368974" y="2963595"/>
-                  </a:lnTo>
-                  <a:lnTo>
-                    <a:pt x="4297351" y="2945027"/>
-                  </a:lnTo>
-                  <a:lnTo>
-                    <a:pt x="4225729" y="2925795"/>
-                  </a:lnTo>
-                  <a:lnTo>
-                    <a:pt x="4154106" y="2905877"/>
-                  </a:lnTo>
-                  <a:lnTo>
-                    <a:pt x="4082483" y="2885247"/>
-                  </a:lnTo>
-                  <a:lnTo>
-                    <a:pt x="4010861" y="2863882"/>
-                  </a:lnTo>
-                  <a:lnTo>
-                    <a:pt x="3939238" y="2841753"/>
-                  </a:lnTo>
-                  <a:lnTo>
-                    <a:pt x="3867616" y="2818835"/>
-                  </a:lnTo>
-                  <a:lnTo>
-                    <a:pt x="3795993" y="2795098"/>
-                  </a:lnTo>
-                  <a:lnTo>
-                    <a:pt x="3724371" y="2770514"/>
-                  </a:lnTo>
-                  <a:lnTo>
-                    <a:pt x="3652748" y="2745052"/>
-                  </a:lnTo>
-                  <a:lnTo>
-                    <a:pt x="3581126" y="2718682"/>
-                  </a:lnTo>
-                  <a:lnTo>
-                    <a:pt x="3509503" y="2691370"/>
-                  </a:lnTo>
-                  <a:lnTo>
-                    <a:pt x="3437881" y="2663083"/>
-                  </a:lnTo>
-                  <a:lnTo>
-                    <a:pt x="3366258" y="2647901"/>
-                  </a:lnTo>
-                  <a:lnTo>
-                    <a:pt x="3294636" y="2638645"/>
-                  </a:lnTo>
-                  <a:lnTo>
-                    <a:pt x="3223013" y="2629286"/>
-                  </a:lnTo>
-                  <a:lnTo>
-                    <a:pt x="3151391" y="2619824"/>
-                  </a:lnTo>
-                  <a:lnTo>
-                    <a:pt x="3079768" y="2610257"/>
-                  </a:lnTo>
-                  <a:lnTo>
-                    <a:pt x="3008146" y="2600584"/>
-                  </a:lnTo>
-                  <a:lnTo>
-                    <a:pt x="2936523" y="2590803"/>
-                  </a:lnTo>
-                  <a:lnTo>
-                    <a:pt x="2864901" y="2580915"/>
-                  </a:lnTo>
-                  <a:lnTo>
-                    <a:pt x="2793278" y="2570917"/>
-                  </a:lnTo>
-                  <a:lnTo>
-                    <a:pt x="2721655" y="2560808"/>
-                  </a:lnTo>
-                  <a:lnTo>
-                    <a:pt x="2650033" y="2550587"/>
-                  </a:lnTo>
-                  <a:lnTo>
-                    <a:pt x="2578410" y="2540253"/>
-                  </a:lnTo>
-                  <a:lnTo>
-                    <a:pt x="2506788" y="2529805"/>
-                  </a:lnTo>
-                  <a:lnTo>
-                    <a:pt x="2435165" y="2519241"/>
-                  </a:lnTo>
-                  <a:lnTo>
-                    <a:pt x="2363543" y="2508560"/>
-                  </a:lnTo>
-                  <a:lnTo>
-                    <a:pt x="2291920" y="2497761"/>
-                  </a:lnTo>
-                  <a:lnTo>
-                    <a:pt x="2220298" y="2486842"/>
-                  </a:lnTo>
-                  <a:lnTo>
-                    <a:pt x="2148675" y="2475802"/>
-                  </a:lnTo>
-                  <a:lnTo>
-                    <a:pt x="2077053" y="2464640"/>
-                  </a:lnTo>
-                  <a:lnTo>
-                    <a:pt x="2005430" y="2453354"/>
-                  </a:lnTo>
-                  <a:lnTo>
-                    <a:pt x="1933808" y="2441944"/>
-                  </a:lnTo>
-                  <a:lnTo>
-                    <a:pt x="1862185" y="2430407"/>
-                  </a:lnTo>
-                  <a:lnTo>
-                    <a:pt x="1790563" y="2418742"/>
-                  </a:lnTo>
-                  <a:lnTo>
-                    <a:pt x="1718940" y="2406948"/>
-                  </a:lnTo>
-                  <a:lnTo>
-                    <a:pt x="1647318" y="2395023"/>
-                  </a:lnTo>
-                  <a:lnTo>
-                    <a:pt x="1575695" y="2382967"/>
-                  </a:lnTo>
-                  <a:lnTo>
-                    <a:pt x="1504073" y="2370777"/>
-                  </a:lnTo>
-                  <a:lnTo>
-                    <a:pt x="1432450" y="2358452"/>
-                  </a:lnTo>
-                  <a:lnTo>
-                    <a:pt x="1360827" y="2345990"/>
-                  </a:lnTo>
-                  <a:lnTo>
-                    <a:pt x="1289205" y="2333390"/>
-                  </a:lnTo>
-                  <a:lnTo>
-                    <a:pt x="1217582" y="2320651"/>
-                  </a:lnTo>
-                  <a:lnTo>
-                    <a:pt x="1145960" y="2307771"/>
-                  </a:lnTo>
-                  <a:lnTo>
-                    <a:pt x="1074337" y="2294748"/>
-                  </a:lnTo>
-                  <a:lnTo>
-                    <a:pt x="1002715" y="2281581"/>
-                  </a:lnTo>
-                  <a:lnTo>
-                    <a:pt x="931092" y="2268268"/>
-                  </a:lnTo>
-                  <a:lnTo>
-                    <a:pt x="859470" y="2254808"/>
-                  </a:lnTo>
-                  <a:lnTo>
-                    <a:pt x="787847" y="2241199"/>
-                  </a:lnTo>
-                  <a:lnTo>
-                    <a:pt x="716225" y="2227438"/>
-                  </a:lnTo>
-                  <a:lnTo>
-                    <a:pt x="644602" y="2213526"/>
-                  </a:lnTo>
-                  <a:lnTo>
-                    <a:pt x="572980" y="2199459"/>
-                  </a:lnTo>
-                  <a:lnTo>
-                    <a:pt x="501357" y="2185237"/>
-                  </a:lnTo>
-                  <a:lnTo>
-                    <a:pt x="429735" y="2170857"/>
-                  </a:lnTo>
-                  <a:lnTo>
-                    <a:pt x="358112" y="2156318"/>
-                  </a:lnTo>
-                  <a:lnTo>
-                    <a:pt x="286490" y="2141618"/>
-                  </a:lnTo>
-                  <a:lnTo>
-                    <a:pt x="214867" y="2126755"/>
-                  </a:lnTo>
-                  <a:lnTo>
-                    <a:pt x="143245" y="2111728"/>
-                  </a:lnTo>
-                  <a:lnTo>
-                    <a:pt x="71622" y="2096534"/>
-                  </a:lnTo>
-                  <a:lnTo>
-                    <a:pt x="0" y="2081172"/>
+                    <a:pt x="501357" y="13220"/>
+                  </a:lnTo>
+                  <a:lnTo>
+                    <a:pt x="572980" y="133158"/>
+                  </a:lnTo>
+                  <a:lnTo>
+                    <a:pt x="644602" y="248950"/>
+                  </a:lnTo>
+                  <a:lnTo>
+                    <a:pt x="716225" y="360741"/>
+                  </a:lnTo>
+                  <a:lnTo>
+                    <a:pt x="787847" y="468669"/>
+                  </a:lnTo>
+                  <a:lnTo>
+                    <a:pt x="859470" y="572866"/>
+                  </a:lnTo>
+                  <a:lnTo>
+                    <a:pt x="931092" y="673463"/>
+                  </a:lnTo>
+                  <a:lnTo>
+                    <a:pt x="1002715" y="770583"/>
+                  </a:lnTo>
+                  <a:lnTo>
+                    <a:pt x="1074337" y="864347"/>
+                  </a:lnTo>
+                  <a:lnTo>
+                    <a:pt x="1145960" y="954871"/>
+                  </a:lnTo>
+                  <a:lnTo>
+                    <a:pt x="1217582" y="1042266"/>
+                  </a:lnTo>
+                  <a:lnTo>
+                    <a:pt x="1289205" y="1126641"/>
+                  </a:lnTo>
+                  <a:lnTo>
+                    <a:pt x="1360827" y="1208100"/>
+                  </a:lnTo>
+                  <a:lnTo>
+                    <a:pt x="1432450" y="1286744"/>
+                  </a:lnTo>
+                  <a:lnTo>
+                    <a:pt x="1504073" y="1362670"/>
+                  </a:lnTo>
+                  <a:lnTo>
+                    <a:pt x="1575695" y="1435972"/>
+                  </a:lnTo>
+                  <a:lnTo>
+                    <a:pt x="1647318" y="1506740"/>
+                  </a:lnTo>
+                  <a:lnTo>
+                    <a:pt x="1718940" y="1575064"/>
+                  </a:lnTo>
+                  <a:lnTo>
+                    <a:pt x="1790563" y="1641025"/>
+                  </a:lnTo>
+                  <a:lnTo>
+                    <a:pt x="1862185" y="1704708"/>
+                  </a:lnTo>
+                  <a:lnTo>
+                    <a:pt x="1933808" y="1766189"/>
+                  </a:lnTo>
+                  <a:lnTo>
+                    <a:pt x="2005430" y="1825546"/>
+                  </a:lnTo>
+                  <a:lnTo>
+                    <a:pt x="2077053" y="1882852"/>
+                  </a:lnTo>
+                  <a:lnTo>
+                    <a:pt x="2148675" y="1938177"/>
+                  </a:lnTo>
+                  <a:lnTo>
+                    <a:pt x="2220298" y="1991590"/>
+                  </a:lnTo>
+                  <a:lnTo>
+                    <a:pt x="2291920" y="2043157"/>
+                  </a:lnTo>
+                  <a:lnTo>
+                    <a:pt x="2363543" y="2092943"/>
+                  </a:lnTo>
+                  <a:lnTo>
+                    <a:pt x="2435165" y="2141007"/>
+                  </a:lnTo>
+                  <a:lnTo>
+                    <a:pt x="2506788" y="2187411"/>
+                  </a:lnTo>
+                  <a:lnTo>
+                    <a:pt x="2578410" y="2232211"/>
+                  </a:lnTo>
+                  <a:lnTo>
+                    <a:pt x="2650033" y="2275462"/>
+                  </a:lnTo>
+                  <a:lnTo>
+                    <a:pt x="2721655" y="2317219"/>
+                  </a:lnTo>
+                  <a:lnTo>
+                    <a:pt x="2793278" y="2357533"/>
+                  </a:lnTo>
+                  <a:lnTo>
+                    <a:pt x="2864901" y="2396454"/>
+                  </a:lnTo>
+                  <a:lnTo>
+                    <a:pt x="2936523" y="2434029"/>
+                  </a:lnTo>
+                  <a:lnTo>
+                    <a:pt x="3008146" y="2470307"/>
+                  </a:lnTo>
+                  <a:lnTo>
+                    <a:pt x="3079768" y="2505330"/>
+                  </a:lnTo>
+                  <a:lnTo>
+                    <a:pt x="3151391" y="2539143"/>
+                  </a:lnTo>
+                  <a:lnTo>
+                    <a:pt x="3223013" y="2571787"/>
+                  </a:lnTo>
+                  <a:lnTo>
+                    <a:pt x="3294636" y="2603304"/>
+                  </a:lnTo>
+                  <a:lnTo>
+                    <a:pt x="3366258" y="2633731"/>
+                  </a:lnTo>
+                  <a:lnTo>
+                    <a:pt x="3437881" y="2657071"/>
+                  </a:lnTo>
+                  <a:lnTo>
+                    <a:pt x="3509503" y="2666174"/>
+                  </a:lnTo>
+                  <a:lnTo>
+                    <a:pt x="3581126" y="2675176"/>
+                  </a:lnTo>
+                  <a:lnTo>
+                    <a:pt x="3652748" y="2684080"/>
+                  </a:lnTo>
+                  <a:lnTo>
+                    <a:pt x="3724371" y="2692885"/>
+                  </a:lnTo>
+                  <a:lnTo>
+                    <a:pt x="3795993" y="2701594"/>
+                  </a:lnTo>
+                  <a:lnTo>
+                    <a:pt x="3867616" y="2710206"/>
+                  </a:lnTo>
+                  <a:lnTo>
+                    <a:pt x="3939238" y="2718724"/>
+                  </a:lnTo>
+                  <a:lnTo>
+                    <a:pt x="4010861" y="2727148"/>
+                  </a:lnTo>
+                  <a:lnTo>
+                    <a:pt x="4082483" y="2735479"/>
+                  </a:lnTo>
+                  <a:lnTo>
+                    <a:pt x="4154106" y="2743719"/>
+                  </a:lnTo>
+                  <a:lnTo>
+                    <a:pt x="4225729" y="2751868"/>
+                  </a:lnTo>
+                  <a:lnTo>
+                    <a:pt x="4297351" y="2759927"/>
+                  </a:lnTo>
+                  <a:lnTo>
+                    <a:pt x="4368974" y="2767897"/>
+                  </a:lnTo>
+                  <a:lnTo>
+                    <a:pt x="4440596" y="2775780"/>
+                  </a:lnTo>
+                  <a:lnTo>
+                    <a:pt x="4512219" y="2783575"/>
+                  </a:lnTo>
+                  <a:lnTo>
+                    <a:pt x="4583841" y="2791285"/>
+                  </a:lnTo>
+                  <a:lnTo>
+                    <a:pt x="4655464" y="2798910"/>
+                  </a:lnTo>
+                  <a:lnTo>
+                    <a:pt x="4727086" y="2806451"/>
+                  </a:lnTo>
+                  <a:lnTo>
+                    <a:pt x="4798709" y="2813909"/>
+                  </a:lnTo>
+                  <a:lnTo>
+                    <a:pt x="4870331" y="2821285"/>
+                  </a:lnTo>
+                  <a:lnTo>
+                    <a:pt x="4941954" y="2828580"/>
+                  </a:lnTo>
+                  <a:lnTo>
+                    <a:pt x="5013576" y="2835794"/>
+                  </a:lnTo>
+                  <a:lnTo>
+                    <a:pt x="5085199" y="2842929"/>
+                  </a:lnTo>
+                  <a:lnTo>
+                    <a:pt x="5156821" y="2849985"/>
+                  </a:lnTo>
+                  <a:lnTo>
+                    <a:pt x="5228444" y="2856964"/>
+                  </a:lnTo>
+                  <a:lnTo>
+                    <a:pt x="5300066" y="2863865"/>
+                  </a:lnTo>
+                  <a:lnTo>
+                    <a:pt x="5371689" y="2870691"/>
+                  </a:lnTo>
+                  <a:lnTo>
+                    <a:pt x="5443311" y="2877442"/>
+                  </a:lnTo>
+                  <a:lnTo>
+                    <a:pt x="5514934" y="2884118"/>
+                  </a:lnTo>
+                  <a:lnTo>
+                    <a:pt x="5586557" y="2890721"/>
+                  </a:lnTo>
+                  <a:lnTo>
+                    <a:pt x="5658179" y="2897251"/>
+                  </a:lnTo>
+                  <a:lnTo>
+                    <a:pt x="5729802" y="2903709"/>
+                  </a:lnTo>
+                  <a:lnTo>
+                    <a:pt x="5801424" y="2910096"/>
+                  </a:lnTo>
+                  <a:lnTo>
+                    <a:pt x="5873047" y="2916413"/>
+                  </a:lnTo>
+                  <a:lnTo>
+                    <a:pt x="5944669" y="2922660"/>
+                  </a:lnTo>
+                  <a:lnTo>
+                    <a:pt x="6016292" y="2928838"/>
+                  </a:lnTo>
+                  <a:lnTo>
+                    <a:pt x="6087914" y="2934949"/>
+                  </a:lnTo>
+                  <a:lnTo>
+                    <a:pt x="6159537" y="2940992"/>
+                  </a:lnTo>
+                  <a:lnTo>
+                    <a:pt x="6231159" y="2946968"/>
+                  </a:lnTo>
+                  <a:lnTo>
+                    <a:pt x="6302782" y="2952879"/>
+                  </a:lnTo>
+                  <a:lnTo>
+                    <a:pt x="6374404" y="2958724"/>
+                  </a:lnTo>
+                  <a:lnTo>
+                    <a:pt x="6446027" y="2964506"/>
+                  </a:lnTo>
+                  <a:lnTo>
+                    <a:pt x="6517649" y="2970223"/>
+                  </a:lnTo>
+                  <a:lnTo>
+                    <a:pt x="6589272" y="2975878"/>
+                  </a:lnTo>
+                  <a:lnTo>
+                    <a:pt x="6660894" y="2981470"/>
+                  </a:lnTo>
+                  <a:lnTo>
+                    <a:pt x="6732517" y="2987001"/>
+                  </a:lnTo>
+                  <a:lnTo>
+                    <a:pt x="6804139" y="2992471"/>
+                  </a:lnTo>
+                  <a:lnTo>
+                    <a:pt x="6875762" y="2997881"/>
+                  </a:lnTo>
+                  <a:lnTo>
+                    <a:pt x="6947385" y="3003231"/>
+                  </a:lnTo>
+                  <a:lnTo>
+                    <a:pt x="7019007" y="3008522"/>
+                  </a:lnTo>
+                  <a:lnTo>
+                    <a:pt x="7090630" y="3013755"/>
+                  </a:lnTo>
+                  <a:lnTo>
+                    <a:pt x="7090630" y="3347235"/>
+                  </a:lnTo>
+                  <a:lnTo>
+                    <a:pt x="7019007" y="3342349"/>
+                  </a:lnTo>
+                  <a:lnTo>
+                    <a:pt x="6947385" y="3337287"/>
+                  </a:lnTo>
+                  <a:lnTo>
+                    <a:pt x="6875762" y="3332045"/>
+                  </a:lnTo>
+                  <a:lnTo>
+                    <a:pt x="6804139" y="3326614"/>
+                  </a:lnTo>
+                  <a:lnTo>
+                    <a:pt x="6732517" y="3320990"/>
+                  </a:lnTo>
+                  <a:lnTo>
+                    <a:pt x="6660894" y="3315164"/>
+                  </a:lnTo>
+                  <a:lnTo>
+                    <a:pt x="6589272" y="3309129"/>
+                  </a:lnTo>
+                  <a:lnTo>
+                    <a:pt x="6517649" y="3302878"/>
+                  </a:lnTo>
+                  <a:lnTo>
+                    <a:pt x="6446027" y="3296404"/>
+                  </a:lnTo>
+                  <a:lnTo>
+                    <a:pt x="6374404" y="3289698"/>
+                  </a:lnTo>
+                  <a:lnTo>
+                    <a:pt x="6302782" y="3282752"/>
+                  </a:lnTo>
+                  <a:lnTo>
+                    <a:pt x="6231159" y="3275557"/>
+                  </a:lnTo>
+                  <a:lnTo>
+                    <a:pt x="6159537" y="3268105"/>
+                  </a:lnTo>
+                  <a:lnTo>
+                    <a:pt x="6087914" y="3260386"/>
+                  </a:lnTo>
+                  <a:lnTo>
+                    <a:pt x="6016292" y="3252390"/>
+                  </a:lnTo>
+                  <a:lnTo>
+                    <a:pt x="5944669" y="3244109"/>
+                  </a:lnTo>
+                  <a:lnTo>
+                    <a:pt x="5873047" y="3235531"/>
+                  </a:lnTo>
+                  <a:lnTo>
+                    <a:pt x="5801424" y="3226645"/>
+                  </a:lnTo>
+                  <a:lnTo>
+                    <a:pt x="5729802" y="3217442"/>
+                  </a:lnTo>
+                  <a:lnTo>
+                    <a:pt x="5658179" y="3207910"/>
+                  </a:lnTo>
+                  <a:lnTo>
+                    <a:pt x="5586557" y="3198036"/>
+                  </a:lnTo>
+                  <a:lnTo>
+                    <a:pt x="5514934" y="3187808"/>
+                  </a:lnTo>
+                  <a:lnTo>
+                    <a:pt x="5443311" y="3177215"/>
+                  </a:lnTo>
+                  <a:lnTo>
+                    <a:pt x="5371689" y="3166243"/>
+                  </a:lnTo>
+                  <a:lnTo>
+                    <a:pt x="5300066" y="3154877"/>
+                  </a:lnTo>
+                  <a:lnTo>
+                    <a:pt x="5228444" y="3143105"/>
+                  </a:lnTo>
+                  <a:lnTo>
+                    <a:pt x="5156821" y="3130911"/>
+                  </a:lnTo>
+                  <a:lnTo>
+                    <a:pt x="5085199" y="3118281"/>
+                  </a:lnTo>
+                  <a:lnTo>
+                    <a:pt x="5013576" y="3105199"/>
+                  </a:lnTo>
+                  <a:lnTo>
+                    <a:pt x="4941954" y="3091649"/>
+                  </a:lnTo>
+                  <a:lnTo>
+                    <a:pt x="4870331" y="3077613"/>
+                  </a:lnTo>
+                  <a:lnTo>
+                    <a:pt x="4798709" y="3063075"/>
+                  </a:lnTo>
+                  <a:lnTo>
+                    <a:pt x="4727086" y="3048017"/>
+                  </a:lnTo>
+                  <a:lnTo>
+                    <a:pt x="4655464" y="3032420"/>
+                  </a:lnTo>
+                  <a:lnTo>
+                    <a:pt x="4583841" y="3016264"/>
+                  </a:lnTo>
+                  <a:lnTo>
+                    <a:pt x="4512219" y="2999530"/>
+                  </a:lnTo>
+                  <a:lnTo>
+                    <a:pt x="4440596" y="2982197"/>
+                  </a:lnTo>
+                  <a:lnTo>
+                    <a:pt x="4368974" y="2964243"/>
+                  </a:lnTo>
+                  <a:lnTo>
+                    <a:pt x="4297351" y="2945647"/>
+                  </a:lnTo>
+                  <a:lnTo>
+                    <a:pt x="4225729" y="2926386"/>
+                  </a:lnTo>
+                  <a:lnTo>
+                    <a:pt x="4154106" y="2906434"/>
+                  </a:lnTo>
+                  <a:lnTo>
+                    <a:pt x="4082483" y="2885769"/>
+                  </a:lnTo>
+                  <a:lnTo>
+                    <a:pt x="4010861" y="2864364"/>
+                  </a:lnTo>
+                  <a:lnTo>
+                    <a:pt x="3939238" y="2842192"/>
+                  </a:lnTo>
+                  <a:lnTo>
+                    <a:pt x="3867616" y="2819227"/>
+                  </a:lnTo>
+                  <a:lnTo>
+                    <a:pt x="3795993" y="2795440"/>
+                  </a:lnTo>
+                  <a:lnTo>
+                    <a:pt x="3724371" y="2770802"/>
+                  </a:lnTo>
+                  <a:lnTo>
+                    <a:pt x="3652748" y="2745281"/>
+                  </a:lnTo>
+                  <a:lnTo>
+                    <a:pt x="3581126" y="2718847"/>
+                  </a:lnTo>
+                  <a:lnTo>
+                    <a:pt x="3509503" y="2691467"/>
+                  </a:lnTo>
+                  <a:lnTo>
+                    <a:pt x="3437881" y="2663106"/>
+                  </a:lnTo>
+                  <a:lnTo>
+                    <a:pt x="3366258" y="2647867"/>
+                  </a:lnTo>
+                  <a:lnTo>
+                    <a:pt x="3294636" y="2638560"/>
+                  </a:lnTo>
+                  <a:lnTo>
+                    <a:pt x="3223013" y="2629150"/>
+                  </a:lnTo>
+                  <a:lnTo>
+                    <a:pt x="3151391" y="2619635"/>
+                  </a:lnTo>
+                  <a:lnTo>
+                    <a:pt x="3079768" y="2610014"/>
+                  </a:lnTo>
+                  <a:lnTo>
+                    <a:pt x="3008146" y="2600285"/>
+                  </a:lnTo>
+                  <a:lnTo>
+                    <a:pt x="2936523" y="2590449"/>
+                  </a:lnTo>
+                  <a:lnTo>
+                    <a:pt x="2864901" y="2580503"/>
+                  </a:lnTo>
+                  <a:lnTo>
+                    <a:pt x="2793278" y="2570446"/>
+                  </a:lnTo>
+                  <a:lnTo>
+                    <a:pt x="2721655" y="2560277"/>
+                  </a:lnTo>
+                  <a:lnTo>
+                    <a:pt x="2650033" y="2549996"/>
+                  </a:lnTo>
+                  <a:lnTo>
+                    <a:pt x="2578410" y="2539599"/>
+                  </a:lnTo>
+                  <a:lnTo>
+                    <a:pt x="2506788" y="2529087"/>
+                  </a:lnTo>
+                  <a:lnTo>
+                    <a:pt x="2435165" y="2518458"/>
+                  </a:lnTo>
+                  <a:lnTo>
+                    <a:pt x="2363543" y="2507710"/>
+                  </a:lnTo>
+                  <a:lnTo>
+                    <a:pt x="2291920" y="2496843"/>
+                  </a:lnTo>
+                  <a:lnTo>
+                    <a:pt x="2220298" y="2485855"/>
+                  </a:lnTo>
+                  <a:lnTo>
+                    <a:pt x="2148675" y="2474744"/>
+                  </a:lnTo>
+                  <a:lnTo>
+                    <a:pt x="2077053" y="2463510"/>
+                  </a:lnTo>
+                  <a:lnTo>
+                    <a:pt x="2005430" y="2452151"/>
+                  </a:lnTo>
+                  <a:lnTo>
+                    <a:pt x="1933808" y="2440665"/>
+                  </a:lnTo>
+                  <a:lnTo>
+                    <a:pt x="1862185" y="2429051"/>
+                  </a:lnTo>
+                  <a:lnTo>
+                    <a:pt x="1790563" y="2417308"/>
+                  </a:lnTo>
+                  <a:lnTo>
+                    <a:pt x="1718940" y="2405434"/>
+                  </a:lnTo>
+                  <a:lnTo>
+                    <a:pt x="1647318" y="2393429"/>
+                  </a:lnTo>
+                  <a:lnTo>
+                    <a:pt x="1575695" y="2381289"/>
+                  </a:lnTo>
+                  <a:lnTo>
+                    <a:pt x="1504073" y="2369014"/>
+                  </a:lnTo>
+                  <a:lnTo>
+                    <a:pt x="1432450" y="2356603"/>
+                  </a:lnTo>
+                  <a:lnTo>
+                    <a:pt x="1360827" y="2344053"/>
+                  </a:lnTo>
+                  <a:lnTo>
+                    <a:pt x="1289205" y="2331364"/>
+                  </a:lnTo>
+                  <a:lnTo>
+                    <a:pt x="1217582" y="2318533"/>
+                  </a:lnTo>
+                  <a:lnTo>
+                    <a:pt x="1145960" y="2305559"/>
+                  </a:lnTo>
+                  <a:lnTo>
+                    <a:pt x="1074337" y="2292442"/>
+                  </a:lnTo>
+                  <a:lnTo>
+                    <a:pt x="1002715" y="2279178"/>
+                  </a:lnTo>
+                  <a:lnTo>
+                    <a:pt x="931092" y="2265766"/>
+                  </a:lnTo>
+                  <a:lnTo>
+                    <a:pt x="859470" y="2252205"/>
+                  </a:lnTo>
+                  <a:lnTo>
+                    <a:pt x="787847" y="2238493"/>
+                  </a:lnTo>
+                  <a:lnTo>
+                    <a:pt x="716225" y="2224628"/>
+                  </a:lnTo>
+                  <a:lnTo>
+                    <a:pt x="644602" y="2210609"/>
+                  </a:lnTo>
+                  <a:lnTo>
+                    <a:pt x="572980" y="2196434"/>
+                  </a:lnTo>
+                  <a:lnTo>
+                    <a:pt x="501357" y="2182101"/>
+                  </a:lnTo>
+                  <a:lnTo>
+                    <a:pt x="429735" y="2167608"/>
+                  </a:lnTo>
+                  <a:lnTo>
+                    <a:pt x="358112" y="2152954"/>
+                  </a:lnTo>
+                  <a:lnTo>
+                    <a:pt x="286490" y="2138137"/>
+                  </a:lnTo>
+                  <a:lnTo>
+                    <a:pt x="214867" y="2123155"/>
+                  </a:lnTo>
+                  <a:lnTo>
+                    <a:pt x="143245" y="2108007"/>
+                  </a:lnTo>
+                  <a:lnTo>
+                    <a:pt x="71622" y="2092689"/>
+                  </a:lnTo>
+                  <a:lnTo>
+                    <a:pt x="0" y="2077201"/>
                   </a:lnTo>
                   <a:close/>
                 </a:path>
@@ -3572,294 +3572,294 @@
           </p:nvSpPr>
           <p:spPr>
             <a:xfrm>
-              <a:off x="1658069" y="2073503"/>
-              <a:ext cx="6604610" cy="3012323"/>
+              <a:off x="1665785" y="2073503"/>
+              <a:ext cx="6596894" cy="3013755"/>
             </a:xfrm>
             <a:custGeom>
               <a:avLst/>
               <a:pathLst>
-                <a:path w="6604610" h="3012323">
+                <a:path w="6596894" h="3013755">
                   <a:moveTo>
                     <a:pt x="0" y="0"/>
                   </a:moveTo>
                   <a:lnTo>
-                    <a:pt x="15338" y="26430"/>
-                  </a:lnTo>
-                  <a:lnTo>
-                    <a:pt x="86960" y="145599"/>
-                  </a:lnTo>
-                  <a:lnTo>
-                    <a:pt x="158583" y="260659"/>
-                  </a:lnTo>
-                  <a:lnTo>
-                    <a:pt x="230205" y="371754"/>
-                  </a:lnTo>
-                  <a:lnTo>
-                    <a:pt x="301828" y="479019"/>
-                  </a:lnTo>
-                  <a:lnTo>
-                    <a:pt x="373450" y="582588"/>
-                  </a:lnTo>
-                  <a:lnTo>
-                    <a:pt x="445073" y="682586"/>
-                  </a:lnTo>
-                  <a:lnTo>
-                    <a:pt x="516695" y="779137"/>
-                  </a:lnTo>
-                  <a:lnTo>
-                    <a:pt x="588318" y="872361"/>
-                  </a:lnTo>
-                  <a:lnTo>
-                    <a:pt x="659940" y="962371"/>
-                  </a:lnTo>
-                  <a:lnTo>
-                    <a:pt x="731563" y="1049279"/>
-                  </a:lnTo>
-                  <a:lnTo>
-                    <a:pt x="803185" y="1133191"/>
-                  </a:lnTo>
-                  <a:lnTo>
-                    <a:pt x="874808" y="1214211"/>
-                  </a:lnTo>
-                  <a:lnTo>
-                    <a:pt x="946430" y="1292438"/>
-                  </a:lnTo>
-                  <a:lnTo>
-                    <a:pt x="1018053" y="1367969"/>
-                  </a:lnTo>
-                  <a:lnTo>
-                    <a:pt x="1089675" y="1440897"/>
-                  </a:lnTo>
-                  <a:lnTo>
-                    <a:pt x="1161298" y="1511311"/>
-                  </a:lnTo>
-                  <a:lnTo>
-                    <a:pt x="1232920" y="1579297"/>
-                  </a:lnTo>
-                  <a:lnTo>
-                    <a:pt x="1304543" y="1644941"/>
-                  </a:lnTo>
-                  <a:lnTo>
-                    <a:pt x="1376166" y="1708321"/>
-                  </a:lnTo>
-                  <a:lnTo>
-                    <a:pt x="1447788" y="1769517"/>
-                  </a:lnTo>
-                  <a:lnTo>
-                    <a:pt x="1519411" y="1828604"/>
-                  </a:lnTo>
-                  <a:lnTo>
-                    <a:pt x="1591033" y="1885654"/>
-                  </a:lnTo>
-                  <a:lnTo>
-                    <a:pt x="1662656" y="1940738"/>
-                  </a:lnTo>
-                  <a:lnTo>
-                    <a:pt x="1734278" y="1993923"/>
-                  </a:lnTo>
-                  <a:lnTo>
-                    <a:pt x="1805901" y="2045275"/>
-                  </a:lnTo>
-                  <a:lnTo>
-                    <a:pt x="1877523" y="2094857"/>
-                  </a:lnTo>
-                  <a:lnTo>
-                    <a:pt x="1949146" y="2142729"/>
-                  </a:lnTo>
-                  <a:lnTo>
-                    <a:pt x="2020768" y="2188952"/>
-                  </a:lnTo>
-                  <a:lnTo>
-                    <a:pt x="2092391" y="2233582"/>
-                  </a:lnTo>
-                  <a:lnTo>
-                    <a:pt x="2164013" y="2276673"/>
-                  </a:lnTo>
-                  <a:lnTo>
-                    <a:pt x="2235636" y="2318279"/>
-                  </a:lnTo>
-                  <a:lnTo>
-                    <a:pt x="2307258" y="2358451"/>
-                  </a:lnTo>
-                  <a:lnTo>
-                    <a:pt x="2378881" y="2397238"/>
-                  </a:lnTo>
-                  <a:lnTo>
-                    <a:pt x="2450503" y="2434688"/>
-                  </a:lnTo>
-                  <a:lnTo>
-                    <a:pt x="2522126" y="2470847"/>
-                  </a:lnTo>
-                  <a:lnTo>
-                    <a:pt x="2593748" y="2505760"/>
-                  </a:lnTo>
-                  <a:lnTo>
-                    <a:pt x="2665371" y="2539470"/>
-                  </a:lnTo>
-                  <a:lnTo>
-                    <a:pt x="2736994" y="2572018"/>
-                  </a:lnTo>
-                  <a:lnTo>
-                    <a:pt x="2808616" y="2603444"/>
-                  </a:lnTo>
-                  <a:lnTo>
-                    <a:pt x="2880239" y="2633786"/>
-                  </a:lnTo>
-                  <a:lnTo>
-                    <a:pt x="2951861" y="2657056"/>
-                  </a:lnTo>
-                  <a:lnTo>
-                    <a:pt x="3023484" y="2666111"/>
-                  </a:lnTo>
-                  <a:lnTo>
-                    <a:pt x="3095106" y="2675066"/>
-                  </a:lnTo>
-                  <a:lnTo>
-                    <a:pt x="3166729" y="2683923"/>
-                  </a:lnTo>
-                  <a:lnTo>
-                    <a:pt x="3238351" y="2692684"/>
-                  </a:lnTo>
-                  <a:lnTo>
-                    <a:pt x="3309974" y="2701348"/>
-                  </a:lnTo>
-                  <a:lnTo>
-                    <a:pt x="3381596" y="2709917"/>
-                  </a:lnTo>
-                  <a:lnTo>
-                    <a:pt x="3453219" y="2718393"/>
-                  </a:lnTo>
-                  <a:lnTo>
-                    <a:pt x="3524841" y="2726776"/>
-                  </a:lnTo>
-                  <a:lnTo>
-                    <a:pt x="3596464" y="2735067"/>
-                  </a:lnTo>
-                  <a:lnTo>
-                    <a:pt x="3668086" y="2743267"/>
-                  </a:lnTo>
-                  <a:lnTo>
-                    <a:pt x="3739709" y="2751377"/>
-                  </a:lnTo>
-                  <a:lnTo>
-                    <a:pt x="3811331" y="2759399"/>
-                  </a:lnTo>
-                  <a:lnTo>
-                    <a:pt x="3882954" y="2767332"/>
-                  </a:lnTo>
-                  <a:lnTo>
-                    <a:pt x="3954576" y="2775179"/>
-                  </a:lnTo>
-                  <a:lnTo>
-                    <a:pt x="4026199" y="2782940"/>
-                  </a:lnTo>
-                  <a:lnTo>
-                    <a:pt x="4097822" y="2790616"/>
-                  </a:lnTo>
-                  <a:lnTo>
-                    <a:pt x="4169444" y="2798207"/>
-                  </a:lnTo>
-                  <a:lnTo>
-                    <a:pt x="4241067" y="2805716"/>
-                  </a:lnTo>
-                  <a:lnTo>
-                    <a:pt x="4312689" y="2813142"/>
-                  </a:lnTo>
-                  <a:lnTo>
-                    <a:pt x="4384312" y="2820487"/>
-                  </a:lnTo>
-                  <a:lnTo>
-                    <a:pt x="4455934" y="2827752"/>
-                  </a:lnTo>
-                  <a:lnTo>
-                    <a:pt x="4527557" y="2834937"/>
-                  </a:lnTo>
-                  <a:lnTo>
-                    <a:pt x="4599179" y="2842043"/>
-                  </a:lnTo>
-                  <a:lnTo>
-                    <a:pt x="4670802" y="2849071"/>
-                  </a:lnTo>
-                  <a:lnTo>
-                    <a:pt x="4742424" y="2856023"/>
-                  </a:lnTo>
-                  <a:lnTo>
-                    <a:pt x="4814047" y="2862898"/>
-                  </a:lnTo>
-                  <a:lnTo>
-                    <a:pt x="4885669" y="2869698"/>
-                  </a:lnTo>
-                  <a:lnTo>
-                    <a:pt x="4957292" y="2876424"/>
-                  </a:lnTo>
-                  <a:lnTo>
-                    <a:pt x="5028914" y="2883076"/>
-                  </a:lnTo>
-                  <a:lnTo>
-                    <a:pt x="5100537" y="2889655"/>
-                  </a:lnTo>
-                  <a:lnTo>
-                    <a:pt x="5172159" y="2896162"/>
-                  </a:lnTo>
-                  <a:lnTo>
-                    <a:pt x="5243782" y="2902597"/>
-                  </a:lnTo>
-                  <a:lnTo>
-                    <a:pt x="5315404" y="2908963"/>
-                  </a:lnTo>
-                  <a:lnTo>
-                    <a:pt x="5387027" y="2915258"/>
-                  </a:lnTo>
-                  <a:lnTo>
-                    <a:pt x="5458650" y="2921485"/>
-                  </a:lnTo>
-                  <a:lnTo>
-                    <a:pt x="5530272" y="2927643"/>
-                  </a:lnTo>
-                  <a:lnTo>
-                    <a:pt x="5601895" y="2933734"/>
-                  </a:lnTo>
-                  <a:lnTo>
-                    <a:pt x="5673517" y="2939758"/>
-                  </a:lnTo>
-                  <a:lnTo>
-                    <a:pt x="5745140" y="2945716"/>
-                  </a:lnTo>
-                  <a:lnTo>
-                    <a:pt x="5816762" y="2951609"/>
-                  </a:lnTo>
-                  <a:lnTo>
-                    <a:pt x="5888385" y="2957437"/>
-                  </a:lnTo>
-                  <a:lnTo>
-                    <a:pt x="5960007" y="2963202"/>
-                  </a:lnTo>
-                  <a:lnTo>
-                    <a:pt x="6031630" y="2968903"/>
-                  </a:lnTo>
-                  <a:lnTo>
-                    <a:pt x="6103252" y="2974542"/>
-                  </a:lnTo>
-                  <a:lnTo>
-                    <a:pt x="6174875" y="2980120"/>
-                  </a:lnTo>
-                  <a:lnTo>
-                    <a:pt x="6246497" y="2985636"/>
-                  </a:lnTo>
-                  <a:lnTo>
-                    <a:pt x="6318120" y="2991091"/>
-                  </a:lnTo>
-                  <a:lnTo>
-                    <a:pt x="6389742" y="2996487"/>
-                  </a:lnTo>
-                  <a:lnTo>
-                    <a:pt x="6461365" y="3001824"/>
-                  </a:lnTo>
-                  <a:lnTo>
-                    <a:pt x="6532987" y="3007103"/>
-                  </a:lnTo>
-                  <a:lnTo>
-                    <a:pt x="6604610" y="3012323"/>
+                    <a:pt x="7621" y="13220"/>
+                  </a:lnTo>
+                  <a:lnTo>
+                    <a:pt x="79244" y="133158"/>
+                  </a:lnTo>
+                  <a:lnTo>
+                    <a:pt x="150867" y="248950"/>
+                  </a:lnTo>
+                  <a:lnTo>
+                    <a:pt x="222489" y="360741"/>
+                  </a:lnTo>
+                  <a:lnTo>
+                    <a:pt x="294112" y="468669"/>
+                  </a:lnTo>
+                  <a:lnTo>
+                    <a:pt x="365734" y="572866"/>
+                  </a:lnTo>
+                  <a:lnTo>
+                    <a:pt x="437357" y="673463"/>
+                  </a:lnTo>
+                  <a:lnTo>
+                    <a:pt x="508979" y="770583"/>
+                  </a:lnTo>
+                  <a:lnTo>
+                    <a:pt x="580602" y="864347"/>
+                  </a:lnTo>
+                  <a:lnTo>
+                    <a:pt x="652224" y="954871"/>
+                  </a:lnTo>
+                  <a:lnTo>
+                    <a:pt x="723847" y="1042266"/>
+                  </a:lnTo>
+                  <a:lnTo>
+                    <a:pt x="795469" y="1126641"/>
+                  </a:lnTo>
+                  <a:lnTo>
+                    <a:pt x="867092" y="1208100"/>
+                  </a:lnTo>
+                  <a:lnTo>
+                    <a:pt x="938714" y="1286744"/>
+                  </a:lnTo>
+                  <a:lnTo>
+                    <a:pt x="1010337" y="1362670"/>
+                  </a:lnTo>
+                  <a:lnTo>
+                    <a:pt x="1081959" y="1435972"/>
+                  </a:lnTo>
+                  <a:lnTo>
+                    <a:pt x="1153582" y="1506740"/>
+                  </a:lnTo>
+                  <a:lnTo>
+                    <a:pt x="1225204" y="1575064"/>
+                  </a:lnTo>
+                  <a:lnTo>
+                    <a:pt x="1296827" y="1641025"/>
+                  </a:lnTo>
+                  <a:lnTo>
+                    <a:pt x="1368449" y="1704708"/>
+                  </a:lnTo>
+                  <a:lnTo>
+                    <a:pt x="1440072" y="1766189"/>
+                  </a:lnTo>
+                  <a:lnTo>
+                    <a:pt x="1511695" y="1825546"/>
+                  </a:lnTo>
+                  <a:lnTo>
+                    <a:pt x="1583317" y="1882852"/>
+                  </a:lnTo>
+                  <a:lnTo>
+                    <a:pt x="1654940" y="1938177"/>
+                  </a:lnTo>
+                  <a:lnTo>
+                    <a:pt x="1726562" y="1991590"/>
+                  </a:lnTo>
+                  <a:lnTo>
+                    <a:pt x="1798185" y="2043157"/>
+                  </a:lnTo>
+                  <a:lnTo>
+                    <a:pt x="1869807" y="2092943"/>
+                  </a:lnTo>
+                  <a:lnTo>
+                    <a:pt x="1941430" y="2141007"/>
+                  </a:lnTo>
+                  <a:lnTo>
+                    <a:pt x="2013052" y="2187411"/>
+                  </a:lnTo>
+                  <a:lnTo>
+                    <a:pt x="2084675" y="2232211"/>
+                  </a:lnTo>
+                  <a:lnTo>
+                    <a:pt x="2156297" y="2275462"/>
+                  </a:lnTo>
+                  <a:lnTo>
+                    <a:pt x="2227920" y="2317219"/>
+                  </a:lnTo>
+                  <a:lnTo>
+                    <a:pt x="2299542" y="2357533"/>
+                  </a:lnTo>
+                  <a:lnTo>
+                    <a:pt x="2371165" y="2396454"/>
+                  </a:lnTo>
+                  <a:lnTo>
+                    <a:pt x="2442787" y="2434029"/>
+                  </a:lnTo>
+                  <a:lnTo>
+                    <a:pt x="2514410" y="2470307"/>
+                  </a:lnTo>
+                  <a:lnTo>
+                    <a:pt x="2586032" y="2505330"/>
+                  </a:lnTo>
+                  <a:lnTo>
+                    <a:pt x="2657655" y="2539143"/>
+                  </a:lnTo>
+                  <a:lnTo>
+                    <a:pt x="2729277" y="2571787"/>
+                  </a:lnTo>
+                  <a:lnTo>
+                    <a:pt x="2800900" y="2603304"/>
+                  </a:lnTo>
+                  <a:lnTo>
+                    <a:pt x="2872523" y="2633731"/>
+                  </a:lnTo>
+                  <a:lnTo>
+                    <a:pt x="2944145" y="2657071"/>
+                  </a:lnTo>
+                  <a:lnTo>
+                    <a:pt x="3015768" y="2666174"/>
+                  </a:lnTo>
+                  <a:lnTo>
+                    <a:pt x="3087390" y="2675176"/>
+                  </a:lnTo>
+                  <a:lnTo>
+                    <a:pt x="3159013" y="2684080"/>
+                  </a:lnTo>
+                  <a:lnTo>
+                    <a:pt x="3230635" y="2692885"/>
+                  </a:lnTo>
+                  <a:lnTo>
+                    <a:pt x="3302258" y="2701594"/>
+                  </a:lnTo>
+                  <a:lnTo>
+                    <a:pt x="3373880" y="2710206"/>
+                  </a:lnTo>
+                  <a:lnTo>
+                    <a:pt x="3445503" y="2718724"/>
+                  </a:lnTo>
+                  <a:lnTo>
+                    <a:pt x="3517125" y="2727148"/>
+                  </a:lnTo>
+                  <a:lnTo>
+                    <a:pt x="3588748" y="2735479"/>
+                  </a:lnTo>
+                  <a:lnTo>
+                    <a:pt x="3660370" y="2743719"/>
+                  </a:lnTo>
+                  <a:lnTo>
+                    <a:pt x="3731993" y="2751868"/>
+                  </a:lnTo>
+                  <a:lnTo>
+                    <a:pt x="3803615" y="2759927"/>
+                  </a:lnTo>
+                  <a:lnTo>
+                    <a:pt x="3875238" y="2767897"/>
+                  </a:lnTo>
+                  <a:lnTo>
+                    <a:pt x="3946860" y="2775780"/>
+                  </a:lnTo>
+                  <a:lnTo>
+                    <a:pt x="4018483" y="2783575"/>
+                  </a:lnTo>
+                  <a:lnTo>
+                    <a:pt x="4090105" y="2791285"/>
+                  </a:lnTo>
+                  <a:lnTo>
+                    <a:pt x="4161728" y="2798910"/>
+                  </a:lnTo>
+                  <a:lnTo>
+                    <a:pt x="4233351" y="2806451"/>
+                  </a:lnTo>
+                  <a:lnTo>
+                    <a:pt x="4304973" y="2813909"/>
+                  </a:lnTo>
+                  <a:lnTo>
+                    <a:pt x="4376596" y="2821285"/>
+                  </a:lnTo>
+                  <a:lnTo>
+                    <a:pt x="4448218" y="2828580"/>
+                  </a:lnTo>
+                  <a:lnTo>
+                    <a:pt x="4519841" y="2835794"/>
+                  </a:lnTo>
+                  <a:lnTo>
+                    <a:pt x="4591463" y="2842929"/>
+                  </a:lnTo>
+                  <a:lnTo>
+                    <a:pt x="4663086" y="2849985"/>
+                  </a:lnTo>
+                  <a:lnTo>
+                    <a:pt x="4734708" y="2856964"/>
+                  </a:lnTo>
+                  <a:lnTo>
+                    <a:pt x="4806331" y="2863865"/>
+                  </a:lnTo>
+                  <a:lnTo>
+                    <a:pt x="4877953" y="2870691"/>
+                  </a:lnTo>
+                  <a:lnTo>
+                    <a:pt x="4949576" y="2877442"/>
+                  </a:lnTo>
+                  <a:lnTo>
+                    <a:pt x="5021198" y="2884118"/>
+                  </a:lnTo>
+                  <a:lnTo>
+                    <a:pt x="5092821" y="2890721"/>
+                  </a:lnTo>
+                  <a:lnTo>
+                    <a:pt x="5164443" y="2897251"/>
+                  </a:lnTo>
+                  <a:lnTo>
+                    <a:pt x="5236066" y="2903709"/>
+                  </a:lnTo>
+                  <a:lnTo>
+                    <a:pt x="5307688" y="2910096"/>
+                  </a:lnTo>
+                  <a:lnTo>
+                    <a:pt x="5379311" y="2916413"/>
+                  </a:lnTo>
+                  <a:lnTo>
+                    <a:pt x="5450933" y="2922660"/>
+                  </a:lnTo>
+                  <a:lnTo>
+                    <a:pt x="5522556" y="2928838"/>
+                  </a:lnTo>
+                  <a:lnTo>
+                    <a:pt x="5594179" y="2934949"/>
+                  </a:lnTo>
+                  <a:lnTo>
+                    <a:pt x="5665801" y="2940992"/>
+                  </a:lnTo>
+                  <a:lnTo>
+                    <a:pt x="5737424" y="2946968"/>
+                  </a:lnTo>
+                  <a:lnTo>
+                    <a:pt x="5809046" y="2952879"/>
+                  </a:lnTo>
+                  <a:lnTo>
+                    <a:pt x="5880669" y="2958724"/>
+                  </a:lnTo>
+                  <a:lnTo>
+                    <a:pt x="5952291" y="2964506"/>
+                  </a:lnTo>
+                  <a:lnTo>
+                    <a:pt x="6023914" y="2970223"/>
+                  </a:lnTo>
+                  <a:lnTo>
+                    <a:pt x="6095536" y="2975878"/>
+                  </a:lnTo>
+                  <a:lnTo>
+                    <a:pt x="6167159" y="2981470"/>
+                  </a:lnTo>
+                  <a:lnTo>
+                    <a:pt x="6238781" y="2987001"/>
+                  </a:lnTo>
+                  <a:lnTo>
+                    <a:pt x="6310404" y="2992471"/>
+                  </a:lnTo>
+                  <a:lnTo>
+                    <a:pt x="6382026" y="2997881"/>
+                  </a:lnTo>
+                  <a:lnTo>
+                    <a:pt x="6453649" y="3003231"/>
+                  </a:lnTo>
+                  <a:lnTo>
+                    <a:pt x="6525271" y="3008522"/>
+                  </a:lnTo>
+                  <a:lnTo>
+                    <a:pt x="6596894" y="3013755"/>
                   </a:lnTo>
                 </a:path>
               </a:pathLst>
@@ -3879,309 +3879,309 @@
           </p:nvSpPr>
           <p:spPr>
             <a:xfrm>
-              <a:off x="1172049" y="4154675"/>
-              <a:ext cx="7090630" cy="1265405"/>
+              <a:off x="1172049" y="4150704"/>
+              <a:ext cx="7090630" cy="1270034"/>
             </a:xfrm>
             <a:custGeom>
               <a:avLst/>
               <a:pathLst>
-                <a:path w="7090630" h="1265405">
+                <a:path w="7090630" h="1270034">
                   <a:moveTo>
-                    <a:pt x="7090630" y="1265405"/>
+                    <a:pt x="7090630" y="1270034"/>
                   </a:moveTo>
                   <a:lnTo>
-                    <a:pt x="7019007" y="1260508"/>
-                  </a:lnTo>
-                  <a:lnTo>
-                    <a:pt x="6947385" y="1255437"/>
-                  </a:lnTo>
-                  <a:lnTo>
-                    <a:pt x="6875762" y="1250184"/>
-                  </a:lnTo>
-                  <a:lnTo>
-                    <a:pt x="6804139" y="1244744"/>
-                  </a:lnTo>
-                  <a:lnTo>
-                    <a:pt x="6732517" y="1239109"/>
-                  </a:lnTo>
-                  <a:lnTo>
-                    <a:pt x="6660894" y="1233274"/>
-                  </a:lnTo>
-                  <a:lnTo>
-                    <a:pt x="6589272" y="1227230"/>
-                  </a:lnTo>
-                  <a:lnTo>
-                    <a:pt x="6517649" y="1220970"/>
-                  </a:lnTo>
-                  <a:lnTo>
-                    <a:pt x="6446027" y="1214487"/>
-                  </a:lnTo>
-                  <a:lnTo>
-                    <a:pt x="6374404" y="1207773"/>
-                  </a:lnTo>
-                  <a:lnTo>
-                    <a:pt x="6302782" y="1200819"/>
-                  </a:lnTo>
-                  <a:lnTo>
-                    <a:pt x="6231159" y="1193616"/>
-                  </a:lnTo>
-                  <a:lnTo>
-                    <a:pt x="6159537" y="1186157"/>
-                  </a:lnTo>
-                  <a:lnTo>
-                    <a:pt x="6087914" y="1178431"/>
-                  </a:lnTo>
-                  <a:lnTo>
-                    <a:pt x="6016292" y="1170429"/>
-                  </a:lnTo>
-                  <a:lnTo>
-                    <a:pt x="5944669" y="1162142"/>
-                  </a:lnTo>
-                  <a:lnTo>
-                    <a:pt x="5873047" y="1153559"/>
-                  </a:lnTo>
-                  <a:lnTo>
-                    <a:pt x="5801424" y="1144669"/>
-                  </a:lnTo>
-                  <a:lnTo>
-                    <a:pt x="5729802" y="1135462"/>
-                  </a:lnTo>
-                  <a:lnTo>
-                    <a:pt x="5658179" y="1125927"/>
-                  </a:lnTo>
-                  <a:lnTo>
-                    <a:pt x="5586557" y="1116051"/>
-                  </a:lnTo>
-                  <a:lnTo>
-                    <a:pt x="5514934" y="1105822"/>
-                  </a:lnTo>
-                  <a:lnTo>
-                    <a:pt x="5443311" y="1095228"/>
-                  </a:lnTo>
-                  <a:lnTo>
-                    <a:pt x="5371689" y="1084257"/>
-                  </a:lnTo>
-                  <a:lnTo>
-                    <a:pt x="5300066" y="1072893"/>
-                  </a:lnTo>
-                  <a:lnTo>
-                    <a:pt x="5228444" y="1061124"/>
-                  </a:lnTo>
-                  <a:lnTo>
-                    <a:pt x="5156821" y="1048934"/>
-                  </a:lnTo>
-                  <a:lnTo>
-                    <a:pt x="5085199" y="1036310"/>
-                  </a:lnTo>
-                  <a:lnTo>
-                    <a:pt x="5013576" y="1023235"/>
-                  </a:lnTo>
-                  <a:lnTo>
-                    <a:pt x="4941954" y="1009693"/>
-                  </a:lnTo>
-                  <a:lnTo>
-                    <a:pt x="4870331" y="995667"/>
-                  </a:lnTo>
-                  <a:lnTo>
-                    <a:pt x="4798709" y="981141"/>
-                  </a:lnTo>
-                  <a:lnTo>
-                    <a:pt x="4727086" y="966096"/>
-                  </a:lnTo>
-                  <a:lnTo>
-                    <a:pt x="4655464" y="950515"/>
-                  </a:lnTo>
-                  <a:lnTo>
-                    <a:pt x="4583841" y="934377"/>
-                  </a:lnTo>
-                  <a:lnTo>
-                    <a:pt x="4512219" y="917662"/>
-                  </a:lnTo>
-                  <a:lnTo>
-                    <a:pt x="4440596" y="900352"/>
-                  </a:lnTo>
-                  <a:lnTo>
-                    <a:pt x="4368974" y="882423"/>
-                  </a:lnTo>
-                  <a:lnTo>
-                    <a:pt x="4297351" y="863854"/>
-                  </a:lnTo>
-                  <a:lnTo>
-                    <a:pt x="4225729" y="844622"/>
-                  </a:lnTo>
-                  <a:lnTo>
-                    <a:pt x="4154106" y="824704"/>
-                  </a:lnTo>
-                  <a:lnTo>
-                    <a:pt x="4082483" y="804075"/>
-                  </a:lnTo>
-                  <a:lnTo>
-                    <a:pt x="4010861" y="782709"/>
-                  </a:lnTo>
-                  <a:lnTo>
-                    <a:pt x="3939238" y="760581"/>
-                  </a:lnTo>
-                  <a:lnTo>
-                    <a:pt x="3867616" y="737662"/>
-                  </a:lnTo>
-                  <a:lnTo>
-                    <a:pt x="3795993" y="713926"/>
-                  </a:lnTo>
-                  <a:lnTo>
-                    <a:pt x="3724371" y="689342"/>
-                  </a:lnTo>
-                  <a:lnTo>
-                    <a:pt x="3652748" y="663880"/>
-                  </a:lnTo>
-                  <a:lnTo>
-                    <a:pt x="3581126" y="637509"/>
-                  </a:lnTo>
-                  <a:lnTo>
-                    <a:pt x="3509503" y="610197"/>
-                  </a:lnTo>
-                  <a:lnTo>
-                    <a:pt x="3437881" y="581910"/>
-                  </a:lnTo>
-                  <a:lnTo>
-                    <a:pt x="3366258" y="566729"/>
-                  </a:lnTo>
-                  <a:lnTo>
-                    <a:pt x="3294636" y="557472"/>
-                  </a:lnTo>
-                  <a:lnTo>
-                    <a:pt x="3223013" y="548114"/>
-                  </a:lnTo>
-                  <a:lnTo>
-                    <a:pt x="3151391" y="538651"/>
-                  </a:lnTo>
-                  <a:lnTo>
-                    <a:pt x="3079768" y="529084"/>
-                  </a:lnTo>
-                  <a:lnTo>
-                    <a:pt x="3008146" y="519411"/>
-                  </a:lnTo>
-                  <a:lnTo>
-                    <a:pt x="2936523" y="509631"/>
-                  </a:lnTo>
-                  <a:lnTo>
-                    <a:pt x="2864901" y="499742"/>
-                  </a:lnTo>
-                  <a:lnTo>
-                    <a:pt x="2793278" y="489744"/>
-                  </a:lnTo>
-                  <a:lnTo>
-                    <a:pt x="2721655" y="479636"/>
-                  </a:lnTo>
-                  <a:lnTo>
-                    <a:pt x="2650033" y="469415"/>
-                  </a:lnTo>
-                  <a:lnTo>
-                    <a:pt x="2578410" y="459081"/>
-                  </a:lnTo>
-                  <a:lnTo>
-                    <a:pt x="2506788" y="448633"/>
-                  </a:lnTo>
-                  <a:lnTo>
-                    <a:pt x="2435165" y="438069"/>
-                  </a:lnTo>
-                  <a:lnTo>
-                    <a:pt x="2363543" y="427388"/>
-                  </a:lnTo>
-                  <a:lnTo>
-                    <a:pt x="2291920" y="416588"/>
-                  </a:lnTo>
-                  <a:lnTo>
-                    <a:pt x="2220298" y="405669"/>
-                  </a:lnTo>
-                  <a:lnTo>
-                    <a:pt x="2148675" y="394630"/>
-                  </a:lnTo>
-                  <a:lnTo>
-                    <a:pt x="2077053" y="383468"/>
-                  </a:lnTo>
-                  <a:lnTo>
-                    <a:pt x="2005430" y="372182"/>
-                  </a:lnTo>
-                  <a:lnTo>
-                    <a:pt x="1933808" y="360771"/>
-                  </a:lnTo>
-                  <a:lnTo>
-                    <a:pt x="1862185" y="349234"/>
-                  </a:lnTo>
-                  <a:lnTo>
-                    <a:pt x="1790563" y="337569"/>
-                  </a:lnTo>
-                  <a:lnTo>
-                    <a:pt x="1718940" y="325776"/>
-                  </a:lnTo>
-                  <a:lnTo>
-                    <a:pt x="1647318" y="313851"/>
-                  </a:lnTo>
-                  <a:lnTo>
-                    <a:pt x="1575695" y="301794"/>
-                  </a:lnTo>
-                  <a:lnTo>
-                    <a:pt x="1504073" y="289604"/>
-                  </a:lnTo>
-                  <a:lnTo>
-                    <a:pt x="1432450" y="277279"/>
-                  </a:lnTo>
-                  <a:lnTo>
-                    <a:pt x="1360827" y="264817"/>
-                  </a:lnTo>
-                  <a:lnTo>
-                    <a:pt x="1289205" y="252218"/>
-                  </a:lnTo>
-                  <a:lnTo>
-                    <a:pt x="1217582" y="239479"/>
-                  </a:lnTo>
-                  <a:lnTo>
-                    <a:pt x="1145960" y="226599"/>
-                  </a:lnTo>
-                  <a:lnTo>
-                    <a:pt x="1074337" y="213576"/>
-                  </a:lnTo>
-                  <a:lnTo>
-                    <a:pt x="1002715" y="200409"/>
-                  </a:lnTo>
-                  <a:lnTo>
-                    <a:pt x="931092" y="187096"/>
-                  </a:lnTo>
-                  <a:lnTo>
-                    <a:pt x="859470" y="173635"/>
-                  </a:lnTo>
-                  <a:lnTo>
-                    <a:pt x="787847" y="160026"/>
-                  </a:lnTo>
-                  <a:lnTo>
-                    <a:pt x="716225" y="146266"/>
-                  </a:lnTo>
-                  <a:lnTo>
-                    <a:pt x="644602" y="132353"/>
-                  </a:lnTo>
-                  <a:lnTo>
-                    <a:pt x="572980" y="118287"/>
-                  </a:lnTo>
-                  <a:lnTo>
-                    <a:pt x="501357" y="104065"/>
-                  </a:lnTo>
-                  <a:lnTo>
-                    <a:pt x="429735" y="89685"/>
-                  </a:lnTo>
-                  <a:lnTo>
-                    <a:pt x="358112" y="75146"/>
-                  </a:lnTo>
-                  <a:lnTo>
-                    <a:pt x="286490" y="60446"/>
-                  </a:lnTo>
-                  <a:lnTo>
-                    <a:pt x="214867" y="45583"/>
-                  </a:lnTo>
-                  <a:lnTo>
-                    <a:pt x="143245" y="30555"/>
-                  </a:lnTo>
-                  <a:lnTo>
-                    <a:pt x="71622" y="15362"/>
+                    <a:pt x="7019007" y="1265147"/>
+                  </a:lnTo>
+                  <a:lnTo>
+                    <a:pt x="6947385" y="1260086"/>
+                  </a:lnTo>
+                  <a:lnTo>
+                    <a:pt x="6875762" y="1254843"/>
+                  </a:lnTo>
+                  <a:lnTo>
+                    <a:pt x="6804139" y="1249413"/>
+                  </a:lnTo>
+                  <a:lnTo>
+                    <a:pt x="6732517" y="1243788"/>
+                  </a:lnTo>
+                  <a:lnTo>
+                    <a:pt x="6660894" y="1237962"/>
+                  </a:lnTo>
+                  <a:lnTo>
+                    <a:pt x="6589272" y="1231928"/>
+                  </a:lnTo>
+                  <a:lnTo>
+                    <a:pt x="6517649" y="1225677"/>
+                  </a:lnTo>
+                  <a:lnTo>
+                    <a:pt x="6446027" y="1219203"/>
+                  </a:lnTo>
+                  <a:lnTo>
+                    <a:pt x="6374404" y="1212497"/>
+                  </a:lnTo>
+                  <a:lnTo>
+                    <a:pt x="6302782" y="1205550"/>
+                  </a:lnTo>
+                  <a:lnTo>
+                    <a:pt x="6231159" y="1198356"/>
+                  </a:lnTo>
+                  <a:lnTo>
+                    <a:pt x="6159537" y="1190903"/>
+                  </a:lnTo>
+                  <a:lnTo>
+                    <a:pt x="6087914" y="1183184"/>
+                  </a:lnTo>
+                  <a:lnTo>
+                    <a:pt x="6016292" y="1175189"/>
+                  </a:lnTo>
+                  <a:lnTo>
+                    <a:pt x="5944669" y="1166907"/>
+                  </a:lnTo>
+                  <a:lnTo>
+                    <a:pt x="5873047" y="1158329"/>
+                  </a:lnTo>
+                  <a:lnTo>
+                    <a:pt x="5801424" y="1149444"/>
+                  </a:lnTo>
+                  <a:lnTo>
+                    <a:pt x="5729802" y="1140241"/>
+                  </a:lnTo>
+                  <a:lnTo>
+                    <a:pt x="5658179" y="1130708"/>
+                  </a:lnTo>
+                  <a:lnTo>
+                    <a:pt x="5586557" y="1120834"/>
+                  </a:lnTo>
+                  <a:lnTo>
+                    <a:pt x="5514934" y="1110607"/>
+                  </a:lnTo>
+                  <a:lnTo>
+                    <a:pt x="5443311" y="1100014"/>
+                  </a:lnTo>
+                  <a:lnTo>
+                    <a:pt x="5371689" y="1089041"/>
+                  </a:lnTo>
+                  <a:lnTo>
+                    <a:pt x="5300066" y="1077676"/>
+                  </a:lnTo>
+                  <a:lnTo>
+                    <a:pt x="5228444" y="1065904"/>
+                  </a:lnTo>
+                  <a:lnTo>
+                    <a:pt x="5156821" y="1053710"/>
+                  </a:lnTo>
+                  <a:lnTo>
+                    <a:pt x="5085199" y="1041080"/>
+                  </a:lnTo>
+                  <a:lnTo>
+                    <a:pt x="5013576" y="1027998"/>
+                  </a:lnTo>
+                  <a:lnTo>
+                    <a:pt x="4941954" y="1014447"/>
+                  </a:lnTo>
+                  <a:lnTo>
+                    <a:pt x="4870331" y="1000412"/>
+                  </a:lnTo>
+                  <a:lnTo>
+                    <a:pt x="4798709" y="985874"/>
+                  </a:lnTo>
+                  <a:lnTo>
+                    <a:pt x="4727086" y="970815"/>
+                  </a:lnTo>
+                  <a:lnTo>
+                    <a:pt x="4655464" y="955218"/>
+                  </a:lnTo>
+                  <a:lnTo>
+                    <a:pt x="4583841" y="939062"/>
+                  </a:lnTo>
+                  <a:lnTo>
+                    <a:pt x="4512219" y="922328"/>
+                  </a:lnTo>
+                  <a:lnTo>
+                    <a:pt x="4440596" y="904995"/>
+                  </a:lnTo>
+                  <a:lnTo>
+                    <a:pt x="4368974" y="887042"/>
+                  </a:lnTo>
+                  <a:lnTo>
+                    <a:pt x="4297351" y="868446"/>
+                  </a:lnTo>
+                  <a:lnTo>
+                    <a:pt x="4225729" y="849184"/>
+                  </a:lnTo>
+                  <a:lnTo>
+                    <a:pt x="4154106" y="829233"/>
+                  </a:lnTo>
+                  <a:lnTo>
+                    <a:pt x="4082483" y="808567"/>
+                  </a:lnTo>
+                  <a:lnTo>
+                    <a:pt x="4010861" y="787162"/>
+                  </a:lnTo>
+                  <a:lnTo>
+                    <a:pt x="3939238" y="764991"/>
+                  </a:lnTo>
+                  <a:lnTo>
+                    <a:pt x="3867616" y="742026"/>
+                  </a:lnTo>
+                  <a:lnTo>
+                    <a:pt x="3795993" y="718239"/>
+                  </a:lnTo>
+                  <a:lnTo>
+                    <a:pt x="3724371" y="693600"/>
+                  </a:lnTo>
+                  <a:lnTo>
+                    <a:pt x="3652748" y="668080"/>
+                  </a:lnTo>
+                  <a:lnTo>
+                    <a:pt x="3581126" y="641646"/>
+                  </a:lnTo>
+                  <a:lnTo>
+                    <a:pt x="3509503" y="614265"/>
+                  </a:lnTo>
+                  <a:lnTo>
+                    <a:pt x="3437881" y="585905"/>
+                  </a:lnTo>
+                  <a:lnTo>
+                    <a:pt x="3366258" y="570665"/>
+                  </a:lnTo>
+                  <a:lnTo>
+                    <a:pt x="3294636" y="561359"/>
+                  </a:lnTo>
+                  <a:lnTo>
+                    <a:pt x="3223013" y="551948"/>
+                  </a:lnTo>
+                  <a:lnTo>
+                    <a:pt x="3151391" y="542433"/>
+                  </a:lnTo>
+                  <a:lnTo>
+                    <a:pt x="3079768" y="532812"/>
+                  </a:lnTo>
+                  <a:lnTo>
+                    <a:pt x="3008146" y="523084"/>
+                  </a:lnTo>
+                  <a:lnTo>
+                    <a:pt x="2936523" y="513247"/>
+                  </a:lnTo>
+                  <a:lnTo>
+                    <a:pt x="2864901" y="503301"/>
+                  </a:lnTo>
+                  <a:lnTo>
+                    <a:pt x="2793278" y="493245"/>
+                  </a:lnTo>
+                  <a:lnTo>
+                    <a:pt x="2721655" y="483076"/>
+                  </a:lnTo>
+                  <a:lnTo>
+                    <a:pt x="2650033" y="472794"/>
+                  </a:lnTo>
+                  <a:lnTo>
+                    <a:pt x="2578410" y="462398"/>
+                  </a:lnTo>
+                  <a:lnTo>
+                    <a:pt x="2506788" y="451886"/>
+                  </a:lnTo>
+                  <a:lnTo>
+                    <a:pt x="2435165" y="441256"/>
+                  </a:lnTo>
+                  <a:lnTo>
+                    <a:pt x="2363543" y="430509"/>
+                  </a:lnTo>
+                  <a:lnTo>
+                    <a:pt x="2291920" y="419642"/>
+                  </a:lnTo>
+                  <a:lnTo>
+                    <a:pt x="2220298" y="408653"/>
+                  </a:lnTo>
+                  <a:lnTo>
+                    <a:pt x="2148675" y="397543"/>
+                  </a:lnTo>
+                  <a:lnTo>
+                    <a:pt x="2077053" y="386309"/>
+                  </a:lnTo>
+                  <a:lnTo>
+                    <a:pt x="2005430" y="374949"/>
+                  </a:lnTo>
+                  <a:lnTo>
+                    <a:pt x="1933808" y="363463"/>
+                  </a:lnTo>
+                  <a:lnTo>
+                    <a:pt x="1862185" y="351850"/>
+                  </a:lnTo>
+                  <a:lnTo>
+                    <a:pt x="1790563" y="340107"/>
+                  </a:lnTo>
+                  <a:lnTo>
+                    <a:pt x="1718940" y="328233"/>
+                  </a:lnTo>
+                  <a:lnTo>
+                    <a:pt x="1647318" y="316227"/>
+                  </a:lnTo>
+                  <a:lnTo>
+                    <a:pt x="1575695" y="304087"/>
+                  </a:lnTo>
+                  <a:lnTo>
+                    <a:pt x="1504073" y="291813"/>
+                  </a:lnTo>
+                  <a:lnTo>
+                    <a:pt x="1432450" y="279401"/>
+                  </a:lnTo>
+                  <a:lnTo>
+                    <a:pt x="1360827" y="266852"/>
+                  </a:lnTo>
+                  <a:lnTo>
+                    <a:pt x="1289205" y="254162"/>
+                  </a:lnTo>
+                  <a:lnTo>
+                    <a:pt x="1217582" y="241332"/>
+                  </a:lnTo>
+                  <a:lnTo>
+                    <a:pt x="1145960" y="228358"/>
+                  </a:lnTo>
+                  <a:lnTo>
+                    <a:pt x="1074337" y="215240"/>
+                  </a:lnTo>
+                  <a:lnTo>
+                    <a:pt x="1002715" y="201976"/>
+                  </a:lnTo>
+                  <a:lnTo>
+                    <a:pt x="931092" y="188564"/>
+                  </a:lnTo>
+                  <a:lnTo>
+                    <a:pt x="859470" y="175003"/>
+                  </a:lnTo>
+                  <a:lnTo>
+                    <a:pt x="787847" y="161291"/>
+                  </a:lnTo>
+                  <a:lnTo>
+                    <a:pt x="716225" y="147427"/>
+                  </a:lnTo>
+                  <a:lnTo>
+                    <a:pt x="644602" y="133408"/>
+                  </a:lnTo>
+                  <a:lnTo>
+                    <a:pt x="572980" y="119232"/>
+                  </a:lnTo>
+                  <a:lnTo>
+                    <a:pt x="501357" y="104899"/>
+                  </a:lnTo>
+                  <a:lnTo>
+                    <a:pt x="429735" y="90407"/>
+                  </a:lnTo>
+                  <a:lnTo>
+                    <a:pt x="358112" y="75753"/>
+                  </a:lnTo>
+                  <a:lnTo>
+                    <a:pt x="286490" y="60936"/>
+                  </a:lnTo>
+                  <a:lnTo>
+                    <a:pt x="214867" y="45954"/>
+                  </a:lnTo>
+                  <a:lnTo>
+                    <a:pt x="143245" y="30805"/>
+                  </a:lnTo>
+                  <a:lnTo>
+                    <a:pt x="71622" y="15488"/>
                   </a:lnTo>
                   <a:lnTo>
                     <a:pt x="0" y="0"/>
@@ -4204,312 +4204,312 @@
           </p:nvSpPr>
           <p:spPr>
             <a:xfrm>
-              <a:off x="1172049" y="3067534"/>
-              <a:ext cx="7090630" cy="2235423"/>
+              <a:off x="1172049" y="3058433"/>
+              <a:ext cx="7090630" cy="2245519"/>
             </a:xfrm>
             <a:custGeom>
               <a:avLst/>
               <a:pathLst>
-                <a:path w="7090630" h="2235423">
+                <a:path w="7090630" h="2245519">
                   <a:moveTo>
                     <a:pt x="0" y="0"/>
                   </a:moveTo>
                   <a:lnTo>
-                    <a:pt x="71622" y="56719"/>
-                  </a:lnTo>
-                  <a:lnTo>
-                    <a:pt x="143245" y="112145"/>
-                  </a:lnTo>
-                  <a:lnTo>
-                    <a:pt x="214867" y="166310"/>
-                  </a:lnTo>
-                  <a:lnTo>
-                    <a:pt x="286490" y="219240"/>
-                  </a:lnTo>
-                  <a:lnTo>
-                    <a:pt x="358112" y="270964"/>
-                  </a:lnTo>
-                  <a:lnTo>
-                    <a:pt x="429735" y="321510"/>
-                  </a:lnTo>
-                  <a:lnTo>
-                    <a:pt x="501357" y="370905"/>
-                  </a:lnTo>
-                  <a:lnTo>
-                    <a:pt x="572980" y="419174"/>
-                  </a:lnTo>
-                  <a:lnTo>
-                    <a:pt x="644602" y="466344"/>
-                  </a:lnTo>
-                  <a:lnTo>
-                    <a:pt x="716225" y="512439"/>
-                  </a:lnTo>
-                  <a:lnTo>
-                    <a:pt x="787847" y="557484"/>
-                  </a:lnTo>
-                  <a:lnTo>
-                    <a:pt x="859470" y="601503"/>
-                  </a:lnTo>
-                  <a:lnTo>
-                    <a:pt x="931092" y="644519"/>
-                  </a:lnTo>
-                  <a:lnTo>
-                    <a:pt x="1002715" y="686555"/>
-                  </a:lnTo>
-                  <a:lnTo>
-                    <a:pt x="1074337" y="727633"/>
-                  </a:lnTo>
-                  <a:lnTo>
-                    <a:pt x="1145960" y="767776"/>
-                  </a:lnTo>
-                  <a:lnTo>
-                    <a:pt x="1217582" y="807004"/>
-                  </a:lnTo>
-                  <a:lnTo>
-                    <a:pt x="1289205" y="845338"/>
-                  </a:lnTo>
-                  <a:lnTo>
-                    <a:pt x="1360827" y="882800"/>
-                  </a:lnTo>
-                  <a:lnTo>
-                    <a:pt x="1432450" y="919407"/>
-                  </a:lnTo>
-                  <a:lnTo>
-                    <a:pt x="1504073" y="955181"/>
-                  </a:lnTo>
-                  <a:lnTo>
-                    <a:pt x="1575695" y="990140"/>
-                  </a:lnTo>
-                  <a:lnTo>
-                    <a:pt x="1647318" y="1024302"/>
-                  </a:lnTo>
-                  <a:lnTo>
-                    <a:pt x="1718940" y="1057686"/>
-                  </a:lnTo>
-                  <a:lnTo>
-                    <a:pt x="1790563" y="1090310"/>
-                  </a:lnTo>
-                  <a:lnTo>
-                    <a:pt x="1862185" y="1122190"/>
-                  </a:lnTo>
-                  <a:lnTo>
-                    <a:pt x="1933808" y="1153344"/>
-                  </a:lnTo>
-                  <a:lnTo>
-                    <a:pt x="2005430" y="1183788"/>
-                  </a:lnTo>
-                  <a:lnTo>
-                    <a:pt x="2077053" y="1213539"/>
-                  </a:lnTo>
-                  <a:lnTo>
-                    <a:pt x="2148675" y="1242612"/>
-                  </a:lnTo>
-                  <a:lnTo>
-                    <a:pt x="2220298" y="1271023"/>
-                  </a:lnTo>
-                  <a:lnTo>
-                    <a:pt x="2291920" y="1298786"/>
-                  </a:lnTo>
-                  <a:lnTo>
-                    <a:pt x="2363543" y="1325917"/>
-                  </a:lnTo>
-                  <a:lnTo>
-                    <a:pt x="2435165" y="1352430"/>
-                  </a:lnTo>
-                  <a:lnTo>
-                    <a:pt x="2506788" y="1378339"/>
-                  </a:lnTo>
-                  <a:lnTo>
-                    <a:pt x="2578410" y="1403658"/>
-                  </a:lnTo>
-                  <a:lnTo>
-                    <a:pt x="2650033" y="1428399"/>
-                  </a:lnTo>
-                  <a:lnTo>
-                    <a:pt x="2721655" y="1452578"/>
-                  </a:lnTo>
-                  <a:lnTo>
-                    <a:pt x="2793278" y="1476205"/>
-                  </a:lnTo>
-                  <a:lnTo>
-                    <a:pt x="2864901" y="1499294"/>
-                  </a:lnTo>
-                  <a:lnTo>
-                    <a:pt x="2936523" y="1521857"/>
-                  </a:lnTo>
-                  <a:lnTo>
-                    <a:pt x="3008146" y="1543906"/>
-                  </a:lnTo>
-                  <a:lnTo>
-                    <a:pt x="3079768" y="1565453"/>
-                  </a:lnTo>
-                  <a:lnTo>
-                    <a:pt x="3151391" y="1586509"/>
-                  </a:lnTo>
-                  <a:lnTo>
-                    <a:pt x="3223013" y="1607085"/>
-                  </a:lnTo>
-                  <a:lnTo>
-                    <a:pt x="3294636" y="1627193"/>
-                  </a:lnTo>
-                  <a:lnTo>
-                    <a:pt x="3366258" y="1646842"/>
-                  </a:lnTo>
-                  <a:lnTo>
-                    <a:pt x="3437881" y="1666044"/>
-                  </a:lnTo>
-                  <a:lnTo>
-                    <a:pt x="3509503" y="1684808"/>
-                  </a:lnTo>
-                  <a:lnTo>
-                    <a:pt x="3581126" y="1703145"/>
-                  </a:lnTo>
-                  <a:lnTo>
-                    <a:pt x="3652748" y="1721064"/>
-                  </a:lnTo>
-                  <a:lnTo>
-                    <a:pt x="3724371" y="1738575"/>
-                  </a:lnTo>
-                  <a:lnTo>
-                    <a:pt x="3795993" y="1755687"/>
-                  </a:lnTo>
-                  <a:lnTo>
-                    <a:pt x="3867616" y="1772409"/>
-                  </a:lnTo>
-                  <a:lnTo>
-                    <a:pt x="3939238" y="1788750"/>
-                  </a:lnTo>
-                  <a:lnTo>
-                    <a:pt x="4010861" y="1804719"/>
-                  </a:lnTo>
-                  <a:lnTo>
-                    <a:pt x="4082483" y="1820324"/>
-                  </a:lnTo>
-                  <a:lnTo>
-                    <a:pt x="4154106" y="1835574"/>
-                  </a:lnTo>
-                  <a:lnTo>
-                    <a:pt x="4225729" y="1850476"/>
-                  </a:lnTo>
-                  <a:lnTo>
-                    <a:pt x="4297351" y="1865039"/>
-                  </a:lnTo>
-                  <a:lnTo>
-                    <a:pt x="4368974" y="1879270"/>
-                  </a:lnTo>
-                  <a:lnTo>
-                    <a:pt x="4440596" y="1893177"/>
-                  </a:lnTo>
-                  <a:lnTo>
-                    <a:pt x="4512219" y="1906767"/>
-                  </a:lnTo>
-                  <a:lnTo>
-                    <a:pt x="4583841" y="1920047"/>
-                  </a:lnTo>
-                  <a:lnTo>
-                    <a:pt x="4655464" y="1933025"/>
-                  </a:lnTo>
-                  <a:lnTo>
-                    <a:pt x="4727086" y="1945707"/>
-                  </a:lnTo>
-                  <a:lnTo>
-                    <a:pt x="4798709" y="1958100"/>
-                  </a:lnTo>
-                  <a:lnTo>
-                    <a:pt x="4870331" y="1970211"/>
-                  </a:lnTo>
-                  <a:lnTo>
-                    <a:pt x="4941954" y="1982046"/>
-                  </a:lnTo>
-                  <a:lnTo>
-                    <a:pt x="5013576" y="1993611"/>
-                  </a:lnTo>
-                  <a:lnTo>
-                    <a:pt x="5085199" y="2004913"/>
-                  </a:lnTo>
-                  <a:lnTo>
-                    <a:pt x="5156821" y="2015958"/>
-                  </a:lnTo>
-                  <a:lnTo>
-                    <a:pt x="5228444" y="2026751"/>
-                  </a:lnTo>
-                  <a:lnTo>
-                    <a:pt x="5300066" y="2037298"/>
-                  </a:lnTo>
-                  <a:lnTo>
-                    <a:pt x="5371689" y="2047604"/>
-                  </a:lnTo>
-                  <a:lnTo>
-                    <a:pt x="5443311" y="2057676"/>
-                  </a:lnTo>
-                  <a:lnTo>
-                    <a:pt x="5514934" y="2067519"/>
-                  </a:lnTo>
-                  <a:lnTo>
-                    <a:pt x="5586557" y="2077137"/>
-                  </a:lnTo>
-                  <a:lnTo>
-                    <a:pt x="5658179" y="2086536"/>
-                  </a:lnTo>
-                  <a:lnTo>
-                    <a:pt x="5729802" y="2095721"/>
-                  </a:lnTo>
-                  <a:lnTo>
-                    <a:pt x="5801424" y="2104697"/>
-                  </a:lnTo>
-                  <a:lnTo>
-                    <a:pt x="5873047" y="2113468"/>
-                  </a:lnTo>
-                  <a:lnTo>
-                    <a:pt x="5944669" y="2122039"/>
-                  </a:lnTo>
-                  <a:lnTo>
-                    <a:pt x="6016292" y="2130415"/>
-                  </a:lnTo>
-                  <a:lnTo>
-                    <a:pt x="6087914" y="2138601"/>
-                  </a:lnTo>
-                  <a:lnTo>
-                    <a:pt x="6159537" y="2146600"/>
-                  </a:lnTo>
-                  <a:lnTo>
-                    <a:pt x="6231159" y="2154416"/>
-                  </a:lnTo>
-                  <a:lnTo>
-                    <a:pt x="6302782" y="2162055"/>
-                  </a:lnTo>
-                  <a:lnTo>
-                    <a:pt x="6374404" y="2169519"/>
-                  </a:lnTo>
-                  <a:lnTo>
-                    <a:pt x="6446027" y="2176814"/>
-                  </a:lnTo>
-                  <a:lnTo>
-                    <a:pt x="6517649" y="2183942"/>
-                  </a:lnTo>
-                  <a:lnTo>
-                    <a:pt x="6589272" y="2190908"/>
-                  </a:lnTo>
-                  <a:lnTo>
-                    <a:pt x="6660894" y="2197715"/>
-                  </a:lnTo>
-                  <a:lnTo>
-                    <a:pt x="6732517" y="2204367"/>
-                  </a:lnTo>
-                  <a:lnTo>
-                    <a:pt x="6804139" y="2210868"/>
-                  </a:lnTo>
-                  <a:lnTo>
-                    <a:pt x="6875762" y="2217221"/>
-                  </a:lnTo>
-                  <a:lnTo>
-                    <a:pt x="6947385" y="2223428"/>
-                  </a:lnTo>
-                  <a:lnTo>
-                    <a:pt x="7019007" y="2229495"/>
-                  </a:lnTo>
-                  <a:lnTo>
-                    <a:pt x="7090630" y="2235423"/>
+                    <a:pt x="71622" y="57113"/>
+                  </a:lnTo>
+                  <a:lnTo>
+                    <a:pt x="143245" y="112920"/>
+                  </a:lnTo>
+                  <a:lnTo>
+                    <a:pt x="214867" y="167453"/>
+                  </a:lnTo>
+                  <a:lnTo>
+                    <a:pt x="286490" y="220738"/>
+                  </a:lnTo>
+                  <a:lnTo>
+                    <a:pt x="358112" y="272806"/>
+                  </a:lnTo>
+                  <a:lnTo>
+                    <a:pt x="429735" y="323684"/>
+                  </a:lnTo>
+                  <a:lnTo>
+                    <a:pt x="501357" y="373399"/>
+                  </a:lnTo>
+                  <a:lnTo>
+                    <a:pt x="572980" y="421978"/>
+                  </a:lnTo>
+                  <a:lnTo>
+                    <a:pt x="644602" y="469446"/>
+                  </a:lnTo>
+                  <a:lnTo>
+                    <a:pt x="716225" y="515830"/>
+                  </a:lnTo>
+                  <a:lnTo>
+                    <a:pt x="787847" y="561153"/>
+                  </a:lnTo>
+                  <a:lnTo>
+                    <a:pt x="859470" y="605440"/>
+                  </a:lnTo>
+                  <a:lnTo>
+                    <a:pt x="931092" y="648716"/>
+                  </a:lnTo>
+                  <a:lnTo>
+                    <a:pt x="1002715" y="691002"/>
+                  </a:lnTo>
+                  <a:lnTo>
+                    <a:pt x="1074337" y="732321"/>
+                  </a:lnTo>
+                  <a:lnTo>
+                    <a:pt x="1145960" y="772696"/>
+                  </a:lnTo>
+                  <a:lnTo>
+                    <a:pt x="1217582" y="812149"/>
+                  </a:lnTo>
+                  <a:lnTo>
+                    <a:pt x="1289205" y="850699"/>
+                  </a:lnTo>
+                  <a:lnTo>
+                    <a:pt x="1360827" y="888369"/>
+                  </a:lnTo>
+                  <a:lnTo>
+                    <a:pt x="1432450" y="925177"/>
+                  </a:lnTo>
+                  <a:lnTo>
+                    <a:pt x="1504073" y="961144"/>
+                  </a:lnTo>
+                  <a:lnTo>
+                    <a:pt x="1575695" y="996289"/>
+                  </a:lnTo>
+                  <a:lnTo>
+                    <a:pt x="1647318" y="1030631"/>
+                  </a:lnTo>
+                  <a:lnTo>
+                    <a:pt x="1718940" y="1064188"/>
+                  </a:lnTo>
+                  <a:lnTo>
+                    <a:pt x="1790563" y="1096978"/>
+                  </a:lnTo>
+                  <a:lnTo>
+                    <a:pt x="1862185" y="1129019"/>
+                  </a:lnTo>
+                  <a:lnTo>
+                    <a:pt x="1933808" y="1160327"/>
+                  </a:lnTo>
+                  <a:lnTo>
+                    <a:pt x="2005430" y="1190920"/>
+                  </a:lnTo>
+                  <a:lnTo>
+                    <a:pt x="2077053" y="1220813"/>
+                  </a:lnTo>
+                  <a:lnTo>
+                    <a:pt x="2148675" y="1250023"/>
+                  </a:lnTo>
+                  <a:lnTo>
+                    <a:pt x="2220298" y="1278566"/>
+                  </a:lnTo>
+                  <a:lnTo>
+                    <a:pt x="2291920" y="1306456"/>
+                  </a:lnTo>
+                  <a:lnTo>
+                    <a:pt x="2363543" y="1333708"/>
+                  </a:lnTo>
+                  <a:lnTo>
+                    <a:pt x="2435165" y="1360338"/>
+                  </a:lnTo>
+                  <a:lnTo>
+                    <a:pt x="2506788" y="1386359"/>
+                  </a:lnTo>
+                  <a:lnTo>
+                    <a:pt x="2578410" y="1411786"/>
+                  </a:lnTo>
+                  <a:lnTo>
+                    <a:pt x="2650033" y="1436631"/>
+                  </a:lnTo>
+                  <a:lnTo>
+                    <a:pt x="2721655" y="1460908"/>
+                  </a:lnTo>
+                  <a:lnTo>
+                    <a:pt x="2793278" y="1484631"/>
+                  </a:lnTo>
+                  <a:lnTo>
+                    <a:pt x="2864901" y="1507811"/>
+                  </a:lnTo>
+                  <a:lnTo>
+                    <a:pt x="2936523" y="1530462"/>
+                  </a:lnTo>
+                  <a:lnTo>
+                    <a:pt x="3008146" y="1552594"/>
+                  </a:lnTo>
+                  <a:lnTo>
+                    <a:pt x="3079768" y="1574221"/>
+                  </a:lnTo>
+                  <a:lnTo>
+                    <a:pt x="3151391" y="1595354"/>
+                  </a:lnTo>
+                  <a:lnTo>
+                    <a:pt x="3223013" y="1616003"/>
+                  </a:lnTo>
+                  <a:lnTo>
+                    <a:pt x="3294636" y="1636181"/>
+                  </a:lnTo>
+                  <a:lnTo>
+                    <a:pt x="3366258" y="1655898"/>
+                  </a:lnTo>
+                  <a:lnTo>
+                    <a:pt x="3437881" y="1675163"/>
+                  </a:lnTo>
+                  <a:lnTo>
+                    <a:pt x="3509503" y="1693989"/>
+                  </a:lnTo>
+                  <a:lnTo>
+                    <a:pt x="3581126" y="1712384"/>
+                  </a:lnTo>
+                  <a:lnTo>
+                    <a:pt x="3652748" y="1730359"/>
+                  </a:lnTo>
+                  <a:lnTo>
+                    <a:pt x="3724371" y="1747923"/>
+                  </a:lnTo>
+                  <a:lnTo>
+                    <a:pt x="3795993" y="1765085"/>
+                  </a:lnTo>
+                  <a:lnTo>
+                    <a:pt x="3867616" y="1781855"/>
+                  </a:lnTo>
+                  <a:lnTo>
+                    <a:pt x="3939238" y="1798242"/>
+                  </a:lnTo>
+                  <a:lnTo>
+                    <a:pt x="4010861" y="1814255"/>
+                  </a:lnTo>
+                  <a:lnTo>
+                    <a:pt x="4082483" y="1829901"/>
+                  </a:lnTo>
+                  <a:lnTo>
+                    <a:pt x="4154106" y="1845190"/>
+                  </a:lnTo>
+                  <a:lnTo>
+                    <a:pt x="4225729" y="1860129"/>
+                  </a:lnTo>
+                  <a:lnTo>
+                    <a:pt x="4297351" y="1874727"/>
+                  </a:lnTo>
+                  <a:lnTo>
+                    <a:pt x="4368974" y="1888991"/>
+                  </a:lnTo>
+                  <a:lnTo>
+                    <a:pt x="4440596" y="1902929"/>
+                  </a:lnTo>
+                  <a:lnTo>
+                    <a:pt x="4512219" y="1916549"/>
+                  </a:lnTo>
+                  <a:lnTo>
+                    <a:pt x="4583841" y="1929857"/>
+                  </a:lnTo>
+                  <a:lnTo>
+                    <a:pt x="4655464" y="1942861"/>
+                  </a:lnTo>
+                  <a:lnTo>
+                    <a:pt x="4727086" y="1955568"/>
+                  </a:lnTo>
+                  <a:lnTo>
+                    <a:pt x="4798709" y="1967985"/>
+                  </a:lnTo>
+                  <a:lnTo>
+                    <a:pt x="4870331" y="1980118"/>
+                  </a:lnTo>
+                  <a:lnTo>
+                    <a:pt x="4941954" y="1991973"/>
+                  </a:lnTo>
+                  <a:lnTo>
+                    <a:pt x="5013576" y="2003557"/>
+                  </a:lnTo>
+                  <a:lnTo>
+                    <a:pt x="5085199" y="2014877"/>
+                  </a:lnTo>
+                  <a:lnTo>
+                    <a:pt x="5156821" y="2025938"/>
+                  </a:lnTo>
+                  <a:lnTo>
+                    <a:pt x="5228444" y="2036746"/>
+                  </a:lnTo>
+                  <a:lnTo>
+                    <a:pt x="5300066" y="2047307"/>
+                  </a:lnTo>
+                  <a:lnTo>
+                    <a:pt x="5371689" y="2057627"/>
+                  </a:lnTo>
+                  <a:lnTo>
+                    <a:pt x="5443311" y="2067711"/>
+                  </a:lnTo>
+                  <a:lnTo>
+                    <a:pt x="5514934" y="2077564"/>
+                  </a:lnTo>
+                  <a:lnTo>
+                    <a:pt x="5586557" y="2087192"/>
+                  </a:lnTo>
+                  <a:lnTo>
+                    <a:pt x="5658179" y="2096600"/>
+                  </a:lnTo>
+                  <a:lnTo>
+                    <a:pt x="5729802" y="2105794"/>
+                  </a:lnTo>
+                  <a:lnTo>
+                    <a:pt x="5801424" y="2114776"/>
+                  </a:lnTo>
+                  <a:lnTo>
+                    <a:pt x="5873047" y="2123554"/>
+                  </a:lnTo>
+                  <a:lnTo>
+                    <a:pt x="5944669" y="2132131"/>
+                  </a:lnTo>
+                  <a:lnTo>
+                    <a:pt x="6016292" y="2140512"/>
+                  </a:lnTo>
+                  <a:lnTo>
+                    <a:pt x="6087914" y="2148701"/>
+                  </a:lnTo>
+                  <a:lnTo>
+                    <a:pt x="6159537" y="2156704"/>
+                  </a:lnTo>
+                  <a:lnTo>
+                    <a:pt x="6231159" y="2164523"/>
+                  </a:lnTo>
+                  <a:lnTo>
+                    <a:pt x="6302782" y="2172164"/>
+                  </a:lnTo>
+                  <a:lnTo>
+                    <a:pt x="6374404" y="2179630"/>
+                  </a:lnTo>
+                  <a:lnTo>
+                    <a:pt x="6446027" y="2186925"/>
+                  </a:lnTo>
+                  <a:lnTo>
+                    <a:pt x="6517649" y="2194054"/>
+                  </a:lnTo>
+                  <a:lnTo>
+                    <a:pt x="6589272" y="2201019"/>
+                  </a:lnTo>
+                  <a:lnTo>
+                    <a:pt x="6660894" y="2207826"/>
+                  </a:lnTo>
+                  <a:lnTo>
+                    <a:pt x="6732517" y="2214477"/>
+                  </a:lnTo>
+                  <a:lnTo>
+                    <a:pt x="6804139" y="2220975"/>
+                  </a:lnTo>
+                  <a:lnTo>
+                    <a:pt x="6875762" y="2227326"/>
+                  </a:lnTo>
+                  <a:lnTo>
+                    <a:pt x="6947385" y="2233531"/>
+                  </a:lnTo>
+                  <a:lnTo>
+                    <a:pt x="7019007" y="2239594"/>
+                  </a:lnTo>
+                  <a:lnTo>
+                    <a:pt x="7090630" y="2245519"/>
                   </a:lnTo>
                 </a:path>
               </a:pathLst>
@@ -5117,7 +5117,7 @@
                   <a:latin typeface="Helvetica"/>
                   <a:cs typeface="Helvetica"/>
                 </a:rPr>
-                <a:t>subHR per 10 % decline: 1.32 (1.14-1.52), p_Bonf = 0.001 (n = 6)  |  per IQR decline (Δ = 29.3 %): 2.25 (1.47-3.43)  |  IQR: [-14.6, 14.7] %</a:t>
+                <a:t>subHR per 10 % decline: 1.32 (1.14-1.53), p_Bonf = 0.001 (n = 6)  |  per IQR decline (Δ = 29.3 %): 2.26 (1.48-3.45)  |  IQR: [-14.6, 14.7] %</a:t>
               </a:r>
             </a:p>
           </p:txBody>
